--- a/examples/pptx/designing-your-own-eda-library.pptx
+++ b/examples/pptx/designing-your-own-eda-library.pptx
@@ -3384,7 +3384,7 @@
           <a:lstStyle/>
           <a:p>
             <a:pPr algn="l"/>
-            <a:r>
+            <a:fld id="{4B0E1F8A-6C1D-4E2A-9F3B-7A5C8D2E1F60}" type="slidenum">
               <a:rPr sz="1600" b="0" i="0">
                 <a:solidFill>
                   <a:srgbClr val="9DB0C0"/>
@@ -3392,7 +3392,7 @@
                 <a:latin typeface="Arial"/>
               </a:rPr>
               <a:t>10</a:t>
-            </a:r>
+            </a:fld>
           </a:p>
         </p:txBody>
       </p:sp>
@@ -3655,7 +3655,7 @@
           <a:lstStyle/>
           <a:p>
             <a:pPr algn="l"/>
-            <a:r>
+            <a:fld id="{4B0E1F8A-6C1D-4E2A-9F3B-7A5C8D2E1F60}" type="slidenum">
               <a:rPr sz="1600" b="0" i="0">
                 <a:solidFill>
                   <a:srgbClr val="9DB0C0"/>
@@ -3663,7 +3663,7 @@
                 <a:latin typeface="Arial"/>
               </a:rPr>
               <a:t>11</a:t>
-            </a:r>
+            </a:fld>
           </a:p>
         </p:txBody>
       </p:sp>
@@ -3830,7 +3830,7 @@
           <a:lstStyle/>
           <a:p>
             <a:pPr algn="l"/>
-            <a:r>
+            <a:fld id="{4B0E1F8A-6C1D-4E2A-9F3B-7A5C8D2E1F60}" type="slidenum">
               <a:rPr sz="1600" b="0" i="0">
                 <a:solidFill>
                   <a:srgbClr val="9DB0C0"/>
@@ -3838,7 +3838,7 @@
                 <a:latin typeface="Arial"/>
               </a:rPr>
               <a:t>12</a:t>
-            </a:r>
+            </a:fld>
           </a:p>
         </p:txBody>
       </p:sp>
@@ -4005,7 +4005,7 @@
           <a:lstStyle/>
           <a:p>
             <a:pPr algn="l"/>
-            <a:r>
+            <a:fld id="{4B0E1F8A-6C1D-4E2A-9F3B-7A5C8D2E1F60}" type="slidenum">
               <a:rPr sz="1600" b="0" i="0">
                 <a:solidFill>
                   <a:srgbClr val="9DB0C0"/>
@@ -4013,7 +4013,7 @@
                 <a:latin typeface="Arial"/>
               </a:rPr>
               <a:t>13</a:t>
-            </a:r>
+            </a:fld>
           </a:p>
         </p:txBody>
       </p:sp>
@@ -4180,7 +4180,7 @@
           <a:lstStyle/>
           <a:p>
             <a:pPr algn="l"/>
-            <a:r>
+            <a:fld id="{4B0E1F8A-6C1D-4E2A-9F3B-7A5C8D2E1F60}" type="slidenum">
               <a:rPr sz="1600" b="0" i="0">
                 <a:solidFill>
                   <a:srgbClr val="9DB0C0"/>
@@ -4188,7 +4188,7 @@
                 <a:latin typeface="Arial"/>
               </a:rPr>
               <a:t>14</a:t>
-            </a:r>
+            </a:fld>
           </a:p>
         </p:txBody>
       </p:sp>
@@ -4653,7 +4653,7 @@
           <a:lstStyle/>
           <a:p>
             <a:pPr algn="l"/>
-            <a:r>
+            <a:fld id="{4B0E1F8A-6C1D-4E2A-9F3B-7A5C8D2E1F60}" type="slidenum">
               <a:rPr sz="1600" b="0" i="0">
                 <a:solidFill>
                   <a:srgbClr val="9DB0C0"/>
@@ -4661,7 +4661,7 @@
                 <a:latin typeface="Arial"/>
               </a:rPr>
               <a:t>15</a:t>
-            </a:r>
+            </a:fld>
           </a:p>
         </p:txBody>
       </p:sp>
@@ -5117,7 +5117,7 @@
           <a:lstStyle/>
           <a:p>
             <a:pPr algn="l"/>
-            <a:r>
+            <a:fld id="{4B0E1F8A-6C1D-4E2A-9F3B-7A5C8D2E1F60}" type="slidenum">
               <a:rPr sz="1600" b="0" i="0">
                 <a:solidFill>
                   <a:srgbClr val="9DB0C0"/>
@@ -5125,7 +5125,7 @@
                 <a:latin typeface="Arial"/>
               </a:rPr>
               <a:t>16</a:t>
-            </a:r>
+            </a:fld>
           </a:p>
         </p:txBody>
       </p:sp>
@@ -5318,7 +5318,7 @@
           <a:lstStyle/>
           <a:p>
             <a:pPr algn="l"/>
-            <a:r>
+            <a:fld id="{4B0E1F8A-6C1D-4E2A-9F3B-7A5C8D2E1F60}" type="slidenum">
               <a:rPr sz="1600" b="0" i="0">
                 <a:solidFill>
                   <a:srgbClr val="9DB0C0"/>
@@ -5326,7 +5326,7 @@
                 <a:latin typeface="Arial"/>
               </a:rPr>
               <a:t>17</a:t>
-            </a:r>
+            </a:fld>
           </a:p>
         </p:txBody>
       </p:sp>
@@ -5624,7 +5624,7 @@
           <a:lstStyle/>
           <a:p>
             <a:pPr algn="l"/>
-            <a:r>
+            <a:fld id="{4B0E1F8A-6C1D-4E2A-9F3B-7A5C8D2E1F60}" type="slidenum">
               <a:rPr sz="1600" b="0" i="0">
                 <a:solidFill>
                   <a:srgbClr val="9DB0C0"/>
@@ -5632,7 +5632,7 @@
                 <a:latin typeface="Arial"/>
               </a:rPr>
               <a:t>18</a:t>
-            </a:r>
+            </a:fld>
           </a:p>
         </p:txBody>
       </p:sp>
@@ -5825,7 +5825,7 @@
           <a:lstStyle/>
           <a:p>
             <a:pPr algn="l"/>
-            <a:r>
+            <a:fld id="{4B0E1F8A-6C1D-4E2A-9F3B-7A5C8D2E1F60}" type="slidenum">
               <a:rPr sz="1600" b="0" i="0">
                 <a:solidFill>
                   <a:srgbClr val="9DB0C0"/>
@@ -5833,7 +5833,7 @@
                 <a:latin typeface="Arial"/>
               </a:rPr>
               <a:t>19</a:t>
-            </a:r>
+            </a:fld>
           </a:p>
         </p:txBody>
       </p:sp>
@@ -6517,7 +6517,7 @@
           <a:lstStyle/>
           <a:p>
             <a:pPr algn="l"/>
-            <a:r>
+            <a:fld id="{4B0E1F8A-6C1D-4E2A-9F3B-7A5C8D2E1F60}" type="slidenum">
               <a:rPr sz="1600" b="0" i="0">
                 <a:solidFill>
                   <a:srgbClr val="9DB0C0"/>
@@ -6525,7 +6525,7 @@
                 <a:latin typeface="Arial"/>
               </a:rPr>
               <a:t>2</a:t>
-            </a:r>
+            </a:fld>
           </a:p>
         </p:txBody>
       </p:sp>
@@ -6692,7 +6692,7 @@
           <a:lstStyle/>
           <a:p>
             <a:pPr algn="l"/>
-            <a:r>
+            <a:fld id="{4B0E1F8A-6C1D-4E2A-9F3B-7A5C8D2E1F60}" type="slidenum">
               <a:rPr sz="1600" b="0" i="0">
                 <a:solidFill>
                   <a:srgbClr val="9DB0C0"/>
@@ -6700,7 +6700,7 @@
                 <a:latin typeface="Arial"/>
               </a:rPr>
               <a:t>20</a:t>
-            </a:r>
+            </a:fld>
           </a:p>
         </p:txBody>
       </p:sp>
@@ -7359,7 +7359,7 @@
           <a:lstStyle/>
           <a:p>
             <a:pPr algn="l"/>
-            <a:r>
+            <a:fld id="{4B0E1F8A-6C1D-4E2A-9F3B-7A5C8D2E1F60}" type="slidenum">
               <a:rPr sz="1600" b="0" i="0">
                 <a:solidFill>
                   <a:srgbClr val="9DB0C0"/>
@@ -7367,7 +7367,7 @@
                 <a:latin typeface="Arial"/>
               </a:rPr>
               <a:t>21</a:t>
-            </a:r>
+            </a:fld>
           </a:p>
         </p:txBody>
       </p:sp>
@@ -7823,7 +7823,7 @@
           <a:lstStyle/>
           <a:p>
             <a:pPr algn="l"/>
-            <a:r>
+            <a:fld id="{4B0E1F8A-6C1D-4E2A-9F3B-7A5C8D2E1F60}" type="slidenum">
               <a:rPr sz="1600" b="0" i="0">
                 <a:solidFill>
                   <a:srgbClr val="9DB0C0"/>
@@ -7831,7 +7831,7 @@
                 <a:latin typeface="Arial"/>
               </a:rPr>
               <a:t>22</a:t>
-            </a:r>
+            </a:fld>
           </a:p>
         </p:txBody>
       </p:sp>
@@ -8059,7 +8059,7 @@
           <a:lstStyle/>
           <a:p>
             <a:pPr algn="l"/>
-            <a:r>
+            <a:fld id="{4B0E1F8A-6C1D-4E2A-9F3B-7A5C8D2E1F60}" type="slidenum">
               <a:rPr sz="1600" b="0" i="0">
                 <a:solidFill>
                   <a:srgbClr val="9DB0C0"/>
@@ -8067,7 +8067,7 @@
                 <a:latin typeface="Arial"/>
               </a:rPr>
               <a:t>23</a:t>
-            </a:r>
+            </a:fld>
           </a:p>
         </p:txBody>
       </p:sp>
@@ -8234,7 +8234,7 @@
           <a:lstStyle/>
           <a:p>
             <a:pPr algn="l"/>
-            <a:r>
+            <a:fld id="{4B0E1F8A-6C1D-4E2A-9F3B-7A5C8D2E1F60}" type="slidenum">
               <a:rPr sz="1600" b="0" i="0">
                 <a:solidFill>
                   <a:srgbClr val="9DB0C0"/>
@@ -8242,7 +8242,7 @@
                 <a:latin typeface="Arial"/>
               </a:rPr>
               <a:t>24</a:t>
-            </a:r>
+            </a:fld>
           </a:p>
         </p:txBody>
       </p:sp>
@@ -8435,7 +8435,7 @@
           <a:lstStyle/>
           <a:p>
             <a:pPr algn="l"/>
-            <a:r>
+            <a:fld id="{4B0E1F8A-6C1D-4E2A-9F3B-7A5C8D2E1F60}" type="slidenum">
               <a:rPr sz="1600" b="0" i="0">
                 <a:solidFill>
                   <a:srgbClr val="9DB0C0"/>
@@ -8443,7 +8443,7 @@
                 <a:latin typeface="Arial"/>
               </a:rPr>
               <a:t>25</a:t>
-            </a:r>
+            </a:fld>
           </a:p>
         </p:txBody>
       </p:sp>
@@ -8671,7 +8671,7 @@
           <a:lstStyle/>
           <a:p>
             <a:pPr algn="l"/>
-            <a:r>
+            <a:fld id="{4B0E1F8A-6C1D-4E2A-9F3B-7A5C8D2E1F60}" type="slidenum">
               <a:rPr sz="1600" b="0" i="0">
                 <a:solidFill>
                   <a:srgbClr val="9DB0C0"/>
@@ -8679,7 +8679,7 @@
                 <a:latin typeface="Arial"/>
               </a:rPr>
               <a:t>26</a:t>
-            </a:r>
+            </a:fld>
           </a:p>
         </p:txBody>
       </p:sp>
@@ -9161,7 +9161,7 @@
           <a:lstStyle/>
           <a:p>
             <a:pPr algn="l"/>
-            <a:r>
+            <a:fld id="{4B0E1F8A-6C1D-4E2A-9F3B-7A5C8D2E1F60}" type="slidenum">
               <a:rPr sz="1600" b="0" i="0">
                 <a:solidFill>
                   <a:srgbClr val="9DB0C0"/>
@@ -9169,7 +9169,7 @@
                 <a:latin typeface="Arial"/>
               </a:rPr>
               <a:t>27</a:t>
-            </a:r>
+            </a:fld>
           </a:p>
         </p:txBody>
       </p:sp>
@@ -9336,7 +9336,7 @@
           <a:lstStyle/>
           <a:p>
             <a:pPr algn="l"/>
-            <a:r>
+            <a:fld id="{4B0E1F8A-6C1D-4E2A-9F3B-7A5C8D2E1F60}" type="slidenum">
               <a:rPr sz="1600" b="0" i="0">
                 <a:solidFill>
                   <a:srgbClr val="9DB0C0"/>
@@ -9344,7 +9344,7 @@
                 <a:latin typeface="Arial"/>
               </a:rPr>
               <a:t>28</a:t>
-            </a:r>
+            </a:fld>
           </a:p>
         </p:txBody>
       </p:sp>
@@ -10334,7 +10334,7 @@
           <a:lstStyle/>
           <a:p>
             <a:pPr algn="l"/>
-            <a:r>
+            <a:fld id="{4B0E1F8A-6C1D-4E2A-9F3B-7A5C8D2E1F60}" type="slidenum">
               <a:rPr sz="1600" b="0" i="0">
                 <a:solidFill>
                   <a:srgbClr val="9DB0C0"/>
@@ -10342,7 +10342,7 @@
                 <a:latin typeface="Arial"/>
               </a:rPr>
               <a:t>29</a:t>
-            </a:r>
+            </a:fld>
           </a:p>
         </p:txBody>
       </p:sp>
@@ -10745,7 +10745,7 @@
           <a:lstStyle/>
           <a:p>
             <a:pPr algn="l"/>
-            <a:r>
+            <a:fld id="{4B0E1F8A-6C1D-4E2A-9F3B-7A5C8D2E1F60}" type="slidenum">
               <a:rPr sz="1600" b="0" i="0">
                 <a:solidFill>
                   <a:srgbClr val="9DB0C0"/>
@@ -10753,7 +10753,7 @@
                 <a:latin typeface="Arial"/>
               </a:rPr>
               <a:t>3</a:t>
-            </a:r>
+            </a:fld>
           </a:p>
         </p:txBody>
       </p:sp>
@@ -10946,7 +10946,7 @@
           <a:lstStyle/>
           <a:p>
             <a:pPr algn="l"/>
-            <a:r>
+            <a:fld id="{4B0E1F8A-6C1D-4E2A-9F3B-7A5C8D2E1F60}" type="slidenum">
               <a:rPr sz="1600" b="0" i="0">
                 <a:solidFill>
                   <a:srgbClr val="9DB0C0"/>
@@ -10954,7 +10954,7 @@
                 <a:latin typeface="Arial"/>
               </a:rPr>
               <a:t>30</a:t>
-            </a:r>
+            </a:fld>
           </a:p>
         </p:txBody>
       </p:sp>
@@ -11874,7 +11874,7 @@
           <a:lstStyle/>
           <a:p>
             <a:pPr algn="l"/>
-            <a:r>
+            <a:fld id="{4B0E1F8A-6C1D-4E2A-9F3B-7A5C8D2E1F60}" type="slidenum">
               <a:rPr sz="1600" b="0" i="0">
                 <a:solidFill>
                   <a:srgbClr val="9DB0C0"/>
@@ -11882,7 +11882,7 @@
                 <a:latin typeface="Arial"/>
               </a:rPr>
               <a:t>31</a:t>
-            </a:r>
+            </a:fld>
           </a:p>
         </p:txBody>
       </p:sp>
@@ -13090,7 +13090,7 @@
           <a:lstStyle/>
           <a:p>
             <a:pPr algn="l"/>
-            <a:r>
+            <a:fld id="{4B0E1F8A-6C1D-4E2A-9F3B-7A5C8D2E1F60}" type="slidenum">
               <a:rPr sz="1600" b="0" i="0">
                 <a:solidFill>
                   <a:srgbClr val="9DB0C0"/>
@@ -13098,7 +13098,7 @@
                 <a:latin typeface="Arial"/>
               </a:rPr>
               <a:t>32</a:t>
-            </a:r>
+            </a:fld>
           </a:p>
         </p:txBody>
       </p:sp>
@@ -14508,7 +14508,7 @@
           <a:lstStyle/>
           <a:p>
             <a:pPr algn="l"/>
-            <a:r>
+            <a:fld id="{4B0E1F8A-6C1D-4E2A-9F3B-7A5C8D2E1F60}" type="slidenum">
               <a:rPr sz="1600" b="0" i="0">
                 <a:solidFill>
                   <a:srgbClr val="9DB0C0"/>
@@ -14516,7 +14516,7 @@
                 <a:latin typeface="Arial"/>
               </a:rPr>
               <a:t>33</a:t>
-            </a:r>
+            </a:fld>
           </a:p>
         </p:txBody>
       </p:sp>
@@ -15042,7 +15042,7 @@
           <a:lstStyle/>
           <a:p>
             <a:pPr algn="l"/>
-            <a:r>
+            <a:fld id="{4B0E1F8A-6C1D-4E2A-9F3B-7A5C8D2E1F60}" type="slidenum">
               <a:rPr sz="1600" b="0" i="0">
                 <a:solidFill>
                   <a:srgbClr val="9DB0C0"/>
@@ -15050,7 +15050,7 @@
                 <a:latin typeface="Arial"/>
               </a:rPr>
               <a:t>34</a:t>
-            </a:r>
+            </a:fld>
           </a:p>
         </p:txBody>
       </p:sp>
@@ -15506,7 +15506,7 @@
           <a:lstStyle/>
           <a:p>
             <a:pPr algn="l"/>
-            <a:r>
+            <a:fld id="{4B0E1F8A-6C1D-4E2A-9F3B-7A5C8D2E1F60}" type="slidenum">
               <a:rPr sz="1600" b="0" i="0">
                 <a:solidFill>
                   <a:srgbClr val="9DB0C0"/>
@@ -15514,7 +15514,7 @@
                 <a:latin typeface="Arial"/>
               </a:rPr>
               <a:t>35</a:t>
-            </a:r>
+            </a:fld>
           </a:p>
         </p:txBody>
       </p:sp>
@@ -15681,7 +15681,7 @@
           <a:lstStyle/>
           <a:p>
             <a:pPr algn="l"/>
-            <a:r>
+            <a:fld id="{4B0E1F8A-6C1D-4E2A-9F3B-7A5C8D2E1F60}" type="slidenum">
               <a:rPr sz="1600" b="0" i="0">
                 <a:solidFill>
                   <a:srgbClr val="9DB0C0"/>
@@ -15689,7 +15689,7 @@
                 <a:latin typeface="Arial"/>
               </a:rPr>
               <a:t>36</a:t>
-            </a:r>
+            </a:fld>
           </a:p>
         </p:txBody>
       </p:sp>
@@ -15856,7 +15856,7 @@
           <a:lstStyle/>
           <a:p>
             <a:pPr algn="l"/>
-            <a:r>
+            <a:fld id="{4B0E1F8A-6C1D-4E2A-9F3B-7A5C8D2E1F60}" type="slidenum">
               <a:rPr sz="1600" b="0" i="0">
                 <a:solidFill>
                   <a:srgbClr val="9DB0C0"/>
@@ -15864,7 +15864,7 @@
                 <a:latin typeface="Arial"/>
               </a:rPr>
               <a:t>37</a:t>
-            </a:r>
+            </a:fld>
           </a:p>
         </p:txBody>
       </p:sp>
@@ -16057,7 +16057,7 @@
           <a:lstStyle/>
           <a:p>
             <a:pPr algn="l"/>
-            <a:r>
+            <a:fld id="{4B0E1F8A-6C1D-4E2A-9F3B-7A5C8D2E1F60}" type="slidenum">
               <a:rPr sz="1600" b="0" i="0">
                 <a:solidFill>
                   <a:srgbClr val="9DB0C0"/>
@@ -16065,7 +16065,7 @@
                 <a:latin typeface="Arial"/>
               </a:rPr>
               <a:t>38</a:t>
-            </a:r>
+            </a:fld>
           </a:p>
         </p:txBody>
       </p:sp>
@@ -16232,7 +16232,7 @@
           <a:lstStyle/>
           <a:p>
             <a:pPr algn="l"/>
-            <a:r>
+            <a:fld id="{4B0E1F8A-6C1D-4E2A-9F3B-7A5C8D2E1F60}" type="slidenum">
               <a:rPr sz="1600" b="0" i="0">
                 <a:solidFill>
                   <a:srgbClr val="9DB0C0"/>
@@ -16240,7 +16240,7 @@
                 <a:latin typeface="Arial"/>
               </a:rPr>
               <a:t>39</a:t>
-            </a:r>
+            </a:fld>
           </a:p>
         </p:txBody>
       </p:sp>
@@ -16372,7 +16372,7 @@
           <a:lstStyle/>
           <a:p>
             <a:pPr algn="l"/>
-            <a:r>
+            <a:fld id="{4B0E1F8A-6C1D-4E2A-9F3B-7A5C8D2E1F60}" type="slidenum">
               <a:rPr sz="1600" b="0" i="0">
                 <a:solidFill>
                   <a:srgbClr val="9DB0C0"/>
@@ -16380,7 +16380,7 @@
                 <a:latin typeface="Arial"/>
               </a:rPr>
               <a:t>4</a:t>
-            </a:r>
+            </a:fld>
           </a:p>
         </p:txBody>
       </p:sp>
@@ -17028,7 +17028,7 @@
           <a:lstStyle/>
           <a:p>
             <a:pPr algn="l"/>
-            <a:r>
+            <a:fld id="{4B0E1F8A-6C1D-4E2A-9F3B-7A5C8D2E1F60}" type="slidenum">
               <a:rPr sz="1600" b="0" i="0">
                 <a:solidFill>
                   <a:srgbClr val="9DB0C0"/>
@@ -17036,7 +17036,7 @@
                 <a:latin typeface="Arial"/>
               </a:rPr>
               <a:t>40</a:t>
-            </a:r>
+            </a:fld>
           </a:p>
         </p:txBody>
       </p:sp>
@@ -17203,7 +17203,7 @@
           <a:lstStyle/>
           <a:p>
             <a:pPr algn="l"/>
-            <a:r>
+            <a:fld id="{4B0E1F8A-6C1D-4E2A-9F3B-7A5C8D2E1F60}" type="slidenum">
               <a:rPr sz="1600" b="0" i="0">
                 <a:solidFill>
                   <a:srgbClr val="9DB0C0"/>
@@ -17211,7 +17211,7 @@
                 <a:latin typeface="Arial"/>
               </a:rPr>
               <a:t>41</a:t>
-            </a:r>
+            </a:fld>
           </a:p>
         </p:txBody>
       </p:sp>
@@ -17693,7 +17693,7 @@
           <a:lstStyle/>
           <a:p>
             <a:pPr algn="l"/>
-            <a:r>
+            <a:fld id="{4B0E1F8A-6C1D-4E2A-9F3B-7A5C8D2E1F60}" type="slidenum">
               <a:rPr sz="1600" b="0" i="0">
                 <a:solidFill>
                   <a:srgbClr val="9DB0C0"/>
@@ -17701,7 +17701,7 @@
                 <a:latin typeface="Arial"/>
               </a:rPr>
               <a:t>42</a:t>
-            </a:r>
+            </a:fld>
           </a:p>
         </p:txBody>
       </p:sp>
@@ -17868,7 +17868,7 @@
           <a:lstStyle/>
           <a:p>
             <a:pPr algn="l"/>
-            <a:r>
+            <a:fld id="{4B0E1F8A-6C1D-4E2A-9F3B-7A5C8D2E1F60}" type="slidenum">
               <a:rPr sz="1600" b="0" i="0">
                 <a:solidFill>
                   <a:srgbClr val="9DB0C0"/>
@@ -17876,7 +17876,7 @@
                 <a:latin typeface="Arial"/>
               </a:rPr>
               <a:t>43</a:t>
-            </a:r>
+            </a:fld>
           </a:p>
         </p:txBody>
       </p:sp>
@@ -18489,7 +18489,7 @@
           <a:lstStyle/>
           <a:p>
             <a:pPr algn="l"/>
-            <a:r>
+            <a:fld id="{4B0E1F8A-6C1D-4E2A-9F3B-7A5C8D2E1F60}" type="slidenum">
               <a:rPr sz="1600" b="0" i="0">
                 <a:solidFill>
                   <a:srgbClr val="9DB0C0"/>
@@ -18497,7 +18497,7 @@
                 <a:latin typeface="Arial"/>
               </a:rPr>
               <a:t>44</a:t>
-            </a:r>
+            </a:fld>
           </a:p>
         </p:txBody>
       </p:sp>
@@ -18725,7 +18725,7 @@
           <a:lstStyle/>
           <a:p>
             <a:pPr algn="l"/>
-            <a:r>
+            <a:fld id="{4B0E1F8A-6C1D-4E2A-9F3B-7A5C8D2E1F60}" type="slidenum">
               <a:rPr sz="1600" b="0" i="0">
                 <a:solidFill>
                   <a:srgbClr val="9DB0C0"/>
@@ -18733,7 +18733,7 @@
                 <a:latin typeface="Arial"/>
               </a:rPr>
               <a:t>45</a:t>
-            </a:r>
+            </a:fld>
           </a:p>
         </p:txBody>
       </p:sp>
@@ -18900,7 +18900,7 @@
           <a:lstStyle/>
           <a:p>
             <a:pPr algn="l"/>
-            <a:r>
+            <a:fld id="{4B0E1F8A-6C1D-4E2A-9F3B-7A5C8D2E1F60}" type="slidenum">
               <a:rPr sz="1600" b="0" i="0">
                 <a:solidFill>
                   <a:srgbClr val="9DB0C0"/>
@@ -18908,7 +18908,7 @@
                 <a:latin typeface="Arial"/>
               </a:rPr>
               <a:t>46</a:t>
-            </a:r>
+            </a:fld>
           </a:p>
         </p:txBody>
       </p:sp>
@@ -19066,7 +19066,7 @@
           <a:lstStyle/>
           <a:p>
             <a:pPr algn="l"/>
-            <a:r>
+            <a:fld id="{4B0E1F8A-6C1D-4E2A-9F3B-7A5C8D2E1F60}" type="slidenum">
               <a:rPr sz="1600" b="0" i="0">
                 <a:solidFill>
                   <a:srgbClr val="9DB0C0"/>
@@ -19074,7 +19074,7 @@
                 <a:latin typeface="Arial"/>
               </a:rPr>
               <a:t>47</a:t>
-            </a:r>
+            </a:fld>
           </a:p>
         </p:txBody>
       </p:sp>
@@ -19267,7 +19267,7 @@
           <a:lstStyle/>
           <a:p>
             <a:pPr algn="l"/>
-            <a:r>
+            <a:fld id="{4B0E1F8A-6C1D-4E2A-9F3B-7A5C8D2E1F60}" type="slidenum">
               <a:rPr sz="1600" b="0" i="0">
                 <a:solidFill>
                   <a:srgbClr val="9DB0C0"/>
@@ -19275,7 +19275,7 @@
                 <a:latin typeface="Arial"/>
               </a:rPr>
               <a:t>48</a:t>
-            </a:r>
+            </a:fld>
           </a:p>
         </p:txBody>
       </p:sp>
@@ -19748,7 +19748,7 @@
           <a:lstStyle/>
           <a:p>
             <a:pPr algn="l"/>
-            <a:r>
+            <a:fld id="{4B0E1F8A-6C1D-4E2A-9F3B-7A5C8D2E1F60}" type="slidenum">
               <a:rPr sz="1600" b="0" i="0">
                 <a:solidFill>
                   <a:srgbClr val="9DB0C0"/>
@@ -19756,7 +19756,7 @@
                 <a:latin typeface="Arial"/>
               </a:rPr>
               <a:t>49</a:t>
-            </a:r>
+            </a:fld>
           </a:p>
         </p:txBody>
       </p:sp>
@@ -20641,7 +20641,7 @@
           <a:lstStyle/>
           <a:p>
             <a:pPr algn="l"/>
-            <a:r>
+            <a:fld id="{4B0E1F8A-6C1D-4E2A-9F3B-7A5C8D2E1F60}" type="slidenum">
               <a:rPr sz="1600" b="0" i="0">
                 <a:solidFill>
                   <a:srgbClr val="9DB0C0"/>
@@ -20649,7 +20649,7 @@
                 <a:latin typeface="Arial"/>
               </a:rPr>
               <a:t>5</a:t>
-            </a:r>
+            </a:fld>
           </a:p>
         </p:txBody>
       </p:sp>
@@ -21105,7 +21105,7 @@
           <a:lstStyle/>
           <a:p>
             <a:pPr algn="l"/>
-            <a:r>
+            <a:fld id="{4B0E1F8A-6C1D-4E2A-9F3B-7A5C8D2E1F60}" type="slidenum">
               <a:rPr sz="1600" b="0" i="0">
                 <a:solidFill>
                   <a:srgbClr val="9DB0C0"/>
@@ -21113,7 +21113,7 @@
                 <a:latin typeface="Arial"/>
               </a:rPr>
               <a:t>50</a:t>
-            </a:r>
+            </a:fld>
           </a:p>
         </p:txBody>
       </p:sp>
@@ -21280,7 +21280,7 @@
           <a:lstStyle/>
           <a:p>
             <a:pPr algn="l"/>
-            <a:r>
+            <a:fld id="{4B0E1F8A-6C1D-4E2A-9F3B-7A5C8D2E1F60}" type="slidenum">
               <a:rPr sz="1600" b="0" i="0">
                 <a:solidFill>
                   <a:srgbClr val="9DB0C0"/>
@@ -21288,7 +21288,7 @@
                 <a:latin typeface="Arial"/>
               </a:rPr>
               <a:t>51</a:t>
-            </a:r>
+            </a:fld>
           </a:p>
         </p:txBody>
       </p:sp>
@@ -21446,7 +21446,7 @@
           <a:lstStyle/>
           <a:p>
             <a:pPr algn="l"/>
-            <a:r>
+            <a:fld id="{4B0E1F8A-6C1D-4E2A-9F3B-7A5C8D2E1F60}" type="slidenum">
               <a:rPr sz="1600" b="0" i="0">
                 <a:solidFill>
                   <a:srgbClr val="9DB0C0"/>
@@ -21454,7 +21454,7 @@
                 <a:latin typeface="Arial"/>
               </a:rPr>
               <a:t>52</a:t>
-            </a:r>
+            </a:fld>
           </a:p>
         </p:txBody>
       </p:sp>
@@ -21927,7 +21927,7 @@
           <a:lstStyle/>
           <a:p>
             <a:pPr algn="l"/>
-            <a:r>
+            <a:fld id="{4B0E1F8A-6C1D-4E2A-9F3B-7A5C8D2E1F60}" type="slidenum">
               <a:rPr sz="1600" b="0" i="0">
                 <a:solidFill>
                   <a:srgbClr val="9DB0C0"/>
@@ -21935,7 +21935,7 @@
                 <a:latin typeface="Arial"/>
               </a:rPr>
               <a:t>53</a:t>
-            </a:r>
+            </a:fld>
           </a:p>
         </p:txBody>
       </p:sp>
@@ -22321,7 +22321,7 @@
           <a:lstStyle/>
           <a:p>
             <a:pPr algn="l"/>
-            <a:r>
+            <a:fld id="{4B0E1F8A-6C1D-4E2A-9F3B-7A5C8D2E1F60}" type="slidenum">
               <a:rPr sz="1600" b="0" i="0">
                 <a:solidFill>
                   <a:srgbClr val="9DB0C0"/>
@@ -22329,7 +22329,7 @@
                 <a:latin typeface="Arial"/>
               </a:rPr>
               <a:t>54</a:t>
-            </a:r>
+            </a:fld>
           </a:p>
         </p:txBody>
       </p:sp>
@@ -22522,7 +22522,7 @@
           <a:lstStyle/>
           <a:p>
             <a:pPr algn="l"/>
-            <a:r>
+            <a:fld id="{4B0E1F8A-6C1D-4E2A-9F3B-7A5C8D2E1F60}" type="slidenum">
               <a:rPr sz="1600" b="0" i="0">
                 <a:solidFill>
                   <a:srgbClr val="9DB0C0"/>
@@ -22530,7 +22530,7 @@
                 <a:latin typeface="Arial"/>
               </a:rPr>
               <a:t>55</a:t>
-            </a:r>
+            </a:fld>
           </a:p>
         </p:txBody>
       </p:sp>
@@ -22697,7 +22697,7 @@
           <a:lstStyle/>
           <a:p>
             <a:pPr algn="l"/>
-            <a:r>
+            <a:fld id="{4B0E1F8A-6C1D-4E2A-9F3B-7A5C8D2E1F60}" type="slidenum">
               <a:rPr sz="1600" b="0" i="0">
                 <a:solidFill>
                   <a:srgbClr val="9DB0C0"/>
@@ -22705,7 +22705,7 @@
                 <a:latin typeface="Arial"/>
               </a:rPr>
               <a:t>56</a:t>
-            </a:r>
+            </a:fld>
           </a:p>
         </p:txBody>
       </p:sp>
@@ -22898,7 +22898,7 @@
           <a:lstStyle/>
           <a:p>
             <a:pPr algn="l"/>
-            <a:r>
+            <a:fld id="{4B0E1F8A-6C1D-4E2A-9F3B-7A5C8D2E1F60}" type="slidenum">
               <a:rPr sz="1600" b="0" i="0">
                 <a:solidFill>
                   <a:srgbClr val="9DB0C0"/>
@@ -22906,7 +22906,7 @@
                 <a:latin typeface="Arial"/>
               </a:rPr>
               <a:t>57</a:t>
-            </a:r>
+            </a:fld>
           </a:p>
         </p:txBody>
       </p:sp>
@@ -23309,7 +23309,7 @@
           <a:lstStyle/>
           <a:p>
             <a:pPr algn="l"/>
-            <a:r>
+            <a:fld id="{4B0E1F8A-6C1D-4E2A-9F3B-7A5C8D2E1F60}" type="slidenum">
               <a:rPr sz="1600" b="0" i="0">
                 <a:solidFill>
                   <a:srgbClr val="9DB0C0"/>
@@ -23317,7 +23317,7 @@
                 <a:latin typeface="Arial"/>
               </a:rPr>
               <a:t>58</a:t>
-            </a:r>
+            </a:fld>
           </a:p>
         </p:txBody>
       </p:sp>
@@ -23615,7 +23615,7 @@
           <a:lstStyle/>
           <a:p>
             <a:pPr algn="l"/>
-            <a:r>
+            <a:fld id="{4B0E1F8A-6C1D-4E2A-9F3B-7A5C8D2E1F60}" type="slidenum">
               <a:rPr sz="1600" b="0" i="0">
                 <a:solidFill>
                   <a:srgbClr val="9DB0C0"/>
@@ -23623,7 +23623,7 @@
                 <a:latin typeface="Arial"/>
               </a:rPr>
               <a:t>59</a:t>
-            </a:r>
+            </a:fld>
           </a:p>
         </p:txBody>
       </p:sp>
@@ -24079,7 +24079,7 @@
           <a:lstStyle/>
           <a:p>
             <a:pPr algn="l"/>
-            <a:r>
+            <a:fld id="{4B0E1F8A-6C1D-4E2A-9F3B-7A5C8D2E1F60}" type="slidenum">
               <a:rPr sz="1600" b="0" i="0">
                 <a:solidFill>
                   <a:srgbClr val="9DB0C0"/>
@@ -24087,7 +24087,7 @@
                 <a:latin typeface="Arial"/>
               </a:rPr>
               <a:t>6</a:t>
-            </a:r>
+            </a:fld>
           </a:p>
         </p:txBody>
       </p:sp>
@@ -24315,7 +24315,7 @@
           <a:lstStyle/>
           <a:p>
             <a:pPr algn="l"/>
-            <a:r>
+            <a:fld id="{4B0E1F8A-6C1D-4E2A-9F3B-7A5C8D2E1F60}" type="slidenum">
               <a:rPr sz="1600" b="0" i="0">
                 <a:solidFill>
                   <a:srgbClr val="9DB0C0"/>
@@ -24323,7 +24323,7 @@
                 <a:latin typeface="Arial"/>
               </a:rPr>
               <a:t>60</a:t>
-            </a:r>
+            </a:fld>
           </a:p>
         </p:txBody>
       </p:sp>
@@ -24490,7 +24490,7 @@
           <a:lstStyle/>
           <a:p>
             <a:pPr algn="l"/>
-            <a:r>
+            <a:fld id="{4B0E1F8A-6C1D-4E2A-9F3B-7A5C8D2E1F60}" type="slidenum">
               <a:rPr sz="1600" b="0" i="0">
                 <a:solidFill>
                   <a:srgbClr val="9DB0C0"/>
@@ -24498,7 +24498,7 @@
                 <a:latin typeface="Arial"/>
               </a:rPr>
               <a:t>61</a:t>
-            </a:r>
+            </a:fld>
           </a:p>
         </p:txBody>
       </p:sp>
@@ -25024,7 +25024,7 @@
           <a:lstStyle/>
           <a:p>
             <a:pPr algn="l"/>
-            <a:r>
+            <a:fld id="{4B0E1F8A-6C1D-4E2A-9F3B-7A5C8D2E1F60}" type="slidenum">
               <a:rPr sz="1600" b="0" i="0">
                 <a:solidFill>
                   <a:srgbClr val="9DB0C0"/>
@@ -25032,7 +25032,7 @@
                 <a:latin typeface="Arial"/>
               </a:rPr>
               <a:t>62</a:t>
-            </a:r>
+            </a:fld>
           </a:p>
         </p:txBody>
       </p:sp>
@@ -26092,7 +26092,7 @@
           <a:lstStyle/>
           <a:p>
             <a:pPr algn="l"/>
-            <a:r>
+            <a:fld id="{4B0E1F8A-6C1D-4E2A-9F3B-7A5C8D2E1F60}" type="slidenum">
               <a:rPr sz="1600" b="0" i="0">
                 <a:solidFill>
                   <a:srgbClr val="9DB0C0"/>
@@ -26100,7 +26100,7 @@
                 <a:latin typeface="Arial"/>
               </a:rPr>
               <a:t>63</a:t>
-            </a:r>
+            </a:fld>
           </a:p>
         </p:txBody>
       </p:sp>
@@ -26363,7 +26363,7 @@
           <a:lstStyle/>
           <a:p>
             <a:pPr algn="l"/>
-            <a:r>
+            <a:fld id="{4B0E1F8A-6C1D-4E2A-9F3B-7A5C8D2E1F60}" type="slidenum">
               <a:rPr sz="1600" b="0" i="0">
                 <a:solidFill>
                   <a:srgbClr val="9DB0C0"/>
@@ -26371,7 +26371,7 @@
                 <a:latin typeface="Arial"/>
               </a:rPr>
               <a:t>64</a:t>
-            </a:r>
+            </a:fld>
           </a:p>
         </p:txBody>
       </p:sp>
@@ -26573,7 +26573,7 @@
           <a:lstStyle/>
           <a:p>
             <a:pPr algn="l"/>
-            <a:r>
+            <a:fld id="{4B0E1F8A-6C1D-4E2A-9F3B-7A5C8D2E1F60}" type="slidenum">
               <a:rPr sz="1600" b="0" i="0">
                 <a:solidFill>
                   <a:srgbClr val="9DB0C0"/>
@@ -26581,7 +26581,7 @@
                 <a:latin typeface="Arial"/>
               </a:rPr>
               <a:t>65</a:t>
-            </a:r>
+            </a:fld>
           </a:p>
         </p:txBody>
       </p:sp>
@@ -26748,7 +26748,7 @@
           <a:lstStyle/>
           <a:p>
             <a:pPr algn="l"/>
-            <a:r>
+            <a:fld id="{4B0E1F8A-6C1D-4E2A-9F3B-7A5C8D2E1F60}" type="slidenum">
               <a:rPr sz="1600" b="0" i="0">
                 <a:solidFill>
                   <a:srgbClr val="9DB0C0"/>
@@ -26756,7 +26756,7 @@
                 <a:latin typeface="Arial"/>
               </a:rPr>
               <a:t>7</a:t>
-            </a:r>
+            </a:fld>
           </a:p>
         </p:txBody>
       </p:sp>
@@ -26923,7 +26923,7 @@
           <a:lstStyle/>
           <a:p>
             <a:pPr algn="l"/>
-            <a:r>
+            <a:fld id="{4B0E1F8A-6C1D-4E2A-9F3B-7A5C8D2E1F60}" type="slidenum">
               <a:rPr sz="1600" b="0" i="0">
                 <a:solidFill>
                   <a:srgbClr val="9DB0C0"/>
@@ -26931,7 +26931,7 @@
                 <a:latin typeface="Arial"/>
               </a:rPr>
               <a:t>8</a:t>
-            </a:r>
+            </a:fld>
           </a:p>
         </p:txBody>
       </p:sp>
@@ -27299,7 +27299,7 @@
           <a:lstStyle/>
           <a:p>
             <a:pPr algn="l"/>
-            <a:r>
+            <a:fld id="{4B0E1F8A-6C1D-4E2A-9F3B-7A5C8D2E1F60}" type="slidenum">
               <a:rPr sz="1600" b="0" i="0">
                 <a:solidFill>
                   <a:srgbClr val="9DB0C0"/>
@@ -27307,7 +27307,7 @@
                 <a:latin typeface="Arial"/>
               </a:rPr>
               <a:t>9</a:t>
-            </a:r>
+            </a:fld>
           </a:p>
         </p:txBody>
       </p:sp>

--- a/examples/pptx/designing-your-own-eda-library.pptx
+++ b/examples/pptx/designing-your-own-eda-library.pptx
@@ -7479,7 +7479,7 @@
         <p:spPr>
           <a:xfrm>
             <a:off x="0" y="3965448"/>
-            <a:ext cx="6557328" cy="518159"/>
+            <a:ext cx="5707380" cy="518159"/>
           </a:xfrm>
           <a:prstGeom prst="rect">
             <a:avLst/>
@@ -7552,8 +7552,8 @@
         </p:nvSpPr>
         <p:spPr>
           <a:xfrm>
-            <a:off x="5599341" y="3965448"/>
-            <a:ext cx="6592659" cy="518159"/>
+            <a:off x="6484620" y="3965448"/>
+            <a:ext cx="5707380" cy="518159"/>
           </a:xfrm>
           <a:prstGeom prst="rect">
             <a:avLst/>
@@ -7590,7 +7590,7 @@
         <p:spPr>
           <a:xfrm>
             <a:off x="5435323" y="3310127"/>
-            <a:ext cx="1321355" cy="640080"/>
+            <a:ext cx="1321354" cy="640080"/>
           </a:xfrm>
           <a:prstGeom prst="rect">
             <a:avLst/>
@@ -8010,8 +8010,8 @@
         </p:nvSpPr>
         <p:spPr>
           <a:xfrm>
-            <a:off x="7685236" y="2593848"/>
-            <a:ext cx="4506764" cy="609600"/>
+            <a:off x="7701280" y="2593848"/>
+            <a:ext cx="4490720" cy="609600"/>
           </a:xfrm>
           <a:prstGeom prst="rect">
             <a:avLst/>
@@ -8117,7 +8117,7 @@
         <p:spPr>
           <a:xfrm>
             <a:off x="0" y="4861560"/>
-            <a:ext cx="5405972" cy="609600"/>
+            <a:ext cx="4490720" cy="609600"/>
           </a:xfrm>
           <a:prstGeom prst="rect">
             <a:avLst/>
@@ -8328,8 +8328,8 @@
         </p:nvSpPr>
         <p:spPr>
           <a:xfrm>
-            <a:off x="7550805" y="4861560"/>
-            <a:ext cx="4641195" cy="609600"/>
+            <a:off x="7701280" y="4861560"/>
+            <a:ext cx="4490720" cy="609600"/>
           </a:xfrm>
           <a:prstGeom prst="rect">
             <a:avLst/>
@@ -10004,7 +10004,7 @@
         <p:spPr>
           <a:xfrm>
             <a:off x="4795183" y="4666488"/>
-            <a:ext cx="2601635" cy="518159"/>
+            <a:ext cx="2601634" cy="518159"/>
           </a:xfrm>
           <a:prstGeom prst="rect">
             <a:avLst/>
@@ -10147,7 +10147,7 @@
         <p:spPr>
           <a:xfrm>
             <a:off x="9288294" y="4666488"/>
-            <a:ext cx="1316692" cy="518159"/>
+            <a:ext cx="1316691" cy="518159"/>
           </a:xfrm>
           <a:prstGeom prst="rect">
             <a:avLst/>
@@ -12154,7 +12154,7 @@
         <p:spPr>
           <a:xfrm>
             <a:off x="5235159" y="5583935"/>
-            <a:ext cx="1721683" cy="426720"/>
+            <a:ext cx="1721682" cy="426720"/>
           </a:xfrm>
           <a:prstGeom prst="rect">
             <a:avLst/>
@@ -13525,7 +13525,7 @@
         <p:spPr>
           <a:xfrm>
             <a:off x="5973987" y="1499616"/>
-            <a:ext cx="3676075" cy="518159"/>
+            <a:ext cx="3676074" cy="518159"/>
           </a:xfrm>
           <a:prstGeom prst="rect">
             <a:avLst/>
@@ -13561,8 +13561,8 @@
         </p:nvSpPr>
         <p:spPr>
           <a:xfrm>
-            <a:off x="8680611" y="1499616"/>
-            <a:ext cx="3511389" cy="518159"/>
+            <a:off x="8845296" y="1499616"/>
+            <a:ext cx="3346704" cy="518159"/>
           </a:xfrm>
           <a:prstGeom prst="rect">
             <a:avLst/>
@@ -13737,7 +13737,7 @@
         <p:spPr>
           <a:xfrm>
             <a:off x="6491979" y="2401823"/>
-            <a:ext cx="2640091" cy="936752"/>
+            <a:ext cx="2640090" cy="936752"/>
           </a:xfrm>
           <a:prstGeom prst="rect">
             <a:avLst/>
@@ -13848,7 +13848,7 @@
         <p:spPr>
           <a:xfrm>
             <a:off x="3785355" y="3612895"/>
-            <a:ext cx="2640091" cy="936752"/>
+            <a:ext cx="2640090" cy="936752"/>
           </a:xfrm>
           <a:prstGeom prst="rect">
             <a:avLst/>
@@ -13922,7 +13922,7 @@
         <p:spPr>
           <a:xfrm>
             <a:off x="9198603" y="3612895"/>
-            <a:ext cx="2640091" cy="936752"/>
+            <a:ext cx="2640090" cy="936752"/>
           </a:xfrm>
           <a:prstGeom prst="rect">
             <a:avLst/>
@@ -14102,7 +14102,7 @@
         <p:spPr>
           <a:xfrm>
             <a:off x="9198603" y="4823967"/>
-            <a:ext cx="2640091" cy="936752"/>
+            <a:ext cx="2640090" cy="936752"/>
           </a:xfrm>
           <a:prstGeom prst="rect">
             <a:avLst/>
@@ -39348,7 +39348,7 @@
         <p:spPr>
           <a:xfrm>
             <a:off x="244079" y="4664964"/>
-            <a:ext cx="11703843" cy="609600"/>
+            <a:ext cx="11703842" cy="609600"/>
           </a:xfrm>
           <a:prstGeom prst="rect">
             <a:avLst/>

--- a/examples/pptx/designing-your-own-eda-library.pptx
+++ b/examples/pptx/designing-your-own-eda-library.pptx
@@ -800,8 +800,8 @@
         </p:nvSpPr>
         <p:spPr>
           <a:xfrm>
-            <a:off x="10363200" y="6035040"/>
-            <a:ext cx="1371600" cy="365760"/>
+            <a:off x="11186160" y="6035040"/>
+            <a:ext cx="548640" cy="365760"/>
           </a:xfrm>
         </p:spPr>
         <p:txBody>
@@ -844,7 +844,7 @@
             <a:r>
               <a:rPr sz="6000" b="1" i="0">
                 <a:solidFill>
-                  <a:srgbClr val="8FC1F0"/>
+                  <a:srgbClr val="F0A202"/>
                 </a:solidFill>
                 <a:latin typeface="Arial"/>
               </a:rPr>
@@ -903,8 +903,8 @@
         </p:nvSpPr>
         <p:spPr>
           <a:xfrm>
-            <a:off x="10363200" y="6035040"/>
-            <a:ext cx="1371600" cy="365760"/>
+            <a:off x="11186160" y="6035040"/>
+            <a:ext cx="548640" cy="365760"/>
           </a:xfrm>
         </p:spPr>
         <p:txBody>
@@ -947,7 +947,7 @@
             <a:r>
               <a:rPr sz="4200" b="1" i="0">
                 <a:solidFill>
-                  <a:srgbClr val="8FC1F0"/>
+                  <a:srgbClr val="F0A202"/>
                 </a:solidFill>
                 <a:latin typeface="Arial"/>
               </a:rPr>
@@ -1228,8 +1228,8 @@
         </p:nvSpPr>
         <p:spPr>
           <a:xfrm>
-            <a:off x="10363200" y="6035040"/>
-            <a:ext cx="1371600" cy="365760"/>
+            <a:off x="11186160" y="6035040"/>
+            <a:ext cx="548640" cy="365760"/>
           </a:xfrm>
         </p:spPr>
         <p:txBody>
@@ -1272,7 +1272,7 @@
             <a:r>
               <a:rPr sz="4200" b="1" i="0">
                 <a:solidFill>
-                  <a:srgbClr val="8FC1F0"/>
+                  <a:srgbClr val="F0A202"/>
                 </a:solidFill>
                 <a:latin typeface="Arial"/>
               </a:rPr>
@@ -1553,8 +1553,8 @@
         </p:nvSpPr>
         <p:spPr>
           <a:xfrm>
-            <a:off x="10363200" y="6035040"/>
-            <a:ext cx="1371600" cy="365760"/>
+            <a:off x="11186160" y="6035040"/>
+            <a:ext cx="548640" cy="365760"/>
           </a:xfrm>
         </p:spPr>
         <p:txBody>
@@ -1597,7 +1597,7 @@
             <a:r>
               <a:rPr sz="4200" b="1" i="0">
                 <a:solidFill>
-                  <a:srgbClr val="8FC1F0"/>
+                  <a:srgbClr val="F0A202"/>
                 </a:solidFill>
                 <a:latin typeface="Arial"/>
               </a:rPr>
@@ -1952,8 +1952,8 @@
         </p:nvSpPr>
         <p:spPr>
           <a:xfrm>
-            <a:off x="10363200" y="6035040"/>
-            <a:ext cx="1371600" cy="365760"/>
+            <a:off x="11186160" y="6035040"/>
+            <a:ext cx="548640" cy="365760"/>
           </a:xfrm>
         </p:spPr>
         <p:txBody>
@@ -1996,7 +1996,7 @@
             <a:r>
               <a:rPr sz="4200" b="1" i="0">
                 <a:solidFill>
-                  <a:srgbClr val="8FC1F0"/>
+                  <a:srgbClr val="F0A202"/>
                 </a:solidFill>
                 <a:latin typeface="Arial"/>
               </a:rPr>
@@ -2499,8 +2499,8 @@
         </p:nvSpPr>
         <p:spPr>
           <a:xfrm>
-            <a:off x="10363200" y="6035040"/>
-            <a:ext cx="1371600" cy="365760"/>
+            <a:off x="11186160" y="6035040"/>
+            <a:ext cx="548640" cy="365760"/>
           </a:xfrm>
         </p:spPr>
         <p:txBody>
@@ -2543,7 +2543,7 @@
             <a:r>
               <a:rPr sz="4200" b="1" i="0">
                 <a:solidFill>
-                  <a:srgbClr val="8FC1F0"/>
+                  <a:srgbClr val="F0A202"/>
                 </a:solidFill>
                 <a:latin typeface="Arial"/>
               </a:rPr>
@@ -2676,8 +2676,8 @@
         </p:nvSpPr>
         <p:spPr>
           <a:xfrm>
-            <a:off x="10363200" y="6035040"/>
-            <a:ext cx="1371600" cy="365760"/>
+            <a:off x="11186160" y="6035040"/>
+            <a:ext cx="548640" cy="365760"/>
           </a:xfrm>
         </p:spPr>
         <p:txBody>
@@ -2720,7 +2720,7 @@
             <a:r>
               <a:rPr sz="4200" b="1" i="0">
                 <a:solidFill>
-                  <a:srgbClr val="8FC1F0"/>
+                  <a:srgbClr val="F0A202"/>
                 </a:solidFill>
                 <a:latin typeface="Arial"/>
               </a:rPr>
@@ -3075,8 +3075,8 @@
         </p:nvSpPr>
         <p:spPr>
           <a:xfrm>
-            <a:off x="10363200" y="6035040"/>
-            <a:ext cx="1371600" cy="365760"/>
+            <a:off x="11186160" y="6035040"/>
+            <a:ext cx="548640" cy="365760"/>
           </a:xfrm>
         </p:spPr>
         <p:txBody>
@@ -3188,7 +3188,7 @@
             <a:r>
               <a:rPr sz="4200" b="1" i="0">
                 <a:solidFill>
-                  <a:srgbClr val="E7EDF3"/>
+                  <a:srgbClr val="F0A202"/>
                 </a:solidFill>
                 <a:latin typeface="Arial"/>
               </a:rPr>
@@ -3417,8 +3417,8 @@
         </p:nvSpPr>
         <p:spPr>
           <a:xfrm>
-            <a:off x="10363200" y="6035040"/>
-            <a:ext cx="1371600" cy="365760"/>
+            <a:off x="11186160" y="6035040"/>
+            <a:ext cx="548640" cy="365760"/>
           </a:xfrm>
         </p:spPr>
         <p:txBody>
@@ -3461,7 +3461,7 @@
             <a:r>
               <a:rPr sz="4200" b="1" i="0">
                 <a:solidFill>
-                  <a:srgbClr val="E7EDF3"/>
+                  <a:srgbClr val="F0A202"/>
                 </a:solidFill>
                 <a:latin typeface="Arial"/>
               </a:rPr>
@@ -3922,8 +3922,8 @@
         </p:nvSpPr>
         <p:spPr>
           <a:xfrm>
-            <a:off x="10363200" y="6035040"/>
-            <a:ext cx="1371600" cy="365760"/>
+            <a:off x="11186160" y="6035040"/>
+            <a:ext cx="548640" cy="365760"/>
           </a:xfrm>
         </p:spPr>
         <p:txBody>
@@ -4094,8 +4094,8 @@
         </p:nvSpPr>
         <p:spPr>
           <a:xfrm>
-            <a:off x="10363200" y="6035040"/>
-            <a:ext cx="1371600" cy="365760"/>
+            <a:off x="11186160" y="6035040"/>
+            <a:ext cx="548640" cy="365760"/>
           </a:xfrm>
         </p:spPr>
         <p:txBody>
@@ -4266,8 +4266,8 @@
         </p:nvSpPr>
         <p:spPr>
           <a:xfrm>
-            <a:off x="10363200" y="6035040"/>
-            <a:ext cx="1371600" cy="365760"/>
+            <a:off x="11186160" y="6035040"/>
+            <a:ext cx="548640" cy="365760"/>
           </a:xfrm>
         </p:spPr>
         <p:txBody>
@@ -4438,8 +4438,8 @@
         </p:nvSpPr>
         <p:spPr>
           <a:xfrm>
-            <a:off x="10363200" y="6035040"/>
-            <a:ext cx="1371600" cy="365760"/>
+            <a:off x="11186160" y="6035040"/>
+            <a:ext cx="548640" cy="365760"/>
           </a:xfrm>
         </p:spPr>
         <p:txBody>
@@ -4573,8 +4573,8 @@
         </p:nvSpPr>
         <p:spPr>
           <a:xfrm>
-            <a:off x="10363200" y="6035040"/>
-            <a:ext cx="1371600" cy="365760"/>
+            <a:off x="11186160" y="6035040"/>
+            <a:ext cx="548640" cy="365760"/>
           </a:xfrm>
         </p:spPr>
         <p:txBody>
@@ -4617,7 +4617,7 @@
             <a:r>
               <a:rPr sz="4200" b="1" i="0">
                 <a:solidFill>
-                  <a:srgbClr val="E7EDF3"/>
+                  <a:srgbClr val="F0A202"/>
                 </a:solidFill>
                 <a:latin typeface="Arial"/>
               </a:rPr>
@@ -4787,8 +4787,8 @@
         </p:nvSpPr>
         <p:spPr>
           <a:xfrm>
-            <a:off x="10363200" y="6035040"/>
-            <a:ext cx="1371600" cy="365760"/>
+            <a:off x="11186160" y="6035040"/>
+            <a:ext cx="548640" cy="365760"/>
           </a:xfrm>
         </p:spPr>
         <p:txBody>
@@ -5541,8 +5541,8 @@
         </p:nvSpPr>
         <p:spPr>
           <a:xfrm>
-            <a:off x="10363200" y="6035040"/>
-            <a:ext cx="1371600" cy="365760"/>
+            <a:off x="11186160" y="6035040"/>
+            <a:ext cx="548640" cy="365760"/>
           </a:xfrm>
         </p:spPr>
         <p:txBody>
@@ -5585,7 +5585,7 @@
             <a:r>
               <a:rPr sz="4200" b="1" i="0">
                 <a:solidFill>
-                  <a:srgbClr val="8FC1F0"/>
+                  <a:srgbClr val="F0A202"/>
                 </a:solidFill>
                 <a:latin typeface="Arial"/>
               </a:rPr>
@@ -6233,8 +6233,8 @@
         </p:nvSpPr>
         <p:spPr>
           <a:xfrm>
-            <a:off x="10363200" y="6035040"/>
-            <a:ext cx="1371600" cy="365760"/>
+            <a:off x="11186160" y="6035040"/>
+            <a:ext cx="548640" cy="365760"/>
           </a:xfrm>
         </p:spPr>
         <p:txBody>
@@ -6277,7 +6277,7 @@
             <a:r>
               <a:rPr sz="4200" b="1" i="0">
                 <a:solidFill>
-                  <a:srgbClr val="E7EDF3"/>
+                  <a:srgbClr val="F0A202"/>
                 </a:solidFill>
                 <a:latin typeface="Arial"/>
               </a:rPr>
@@ -6669,8 +6669,8 @@
         </p:nvSpPr>
         <p:spPr>
           <a:xfrm>
-            <a:off x="10363200" y="6035040"/>
-            <a:ext cx="1371600" cy="365760"/>
+            <a:off x="11186160" y="6035040"/>
+            <a:ext cx="548640" cy="365760"/>
           </a:xfrm>
         </p:spPr>
         <p:txBody>
@@ -6713,7 +6713,7 @@
             <a:r>
               <a:rPr sz="4200" b="1" i="0">
                 <a:solidFill>
-                  <a:srgbClr val="8FC1F0"/>
+                  <a:srgbClr val="F0A202"/>
                 </a:solidFill>
                 <a:latin typeface="Arial"/>
               </a:rPr>
@@ -7378,8 +7378,8 @@
         </p:nvSpPr>
         <p:spPr>
           <a:xfrm>
-            <a:off x="10363200" y="6035040"/>
-            <a:ext cx="1371600" cy="365760"/>
+            <a:off x="11186160" y="6035040"/>
+            <a:ext cx="548640" cy="365760"/>
           </a:xfrm>
         </p:spPr>
         <p:txBody>
@@ -7422,7 +7422,7 @@
             <a:r>
               <a:rPr sz="4200" b="1" i="0">
                 <a:solidFill>
-                  <a:srgbClr val="8FC1F0"/>
+                  <a:srgbClr val="F0A202"/>
                 </a:solidFill>
                 <a:latin typeface="Arial"/>
               </a:rPr>
@@ -7666,8 +7666,8 @@
         </p:nvSpPr>
         <p:spPr>
           <a:xfrm>
-            <a:off x="10363200" y="6035040"/>
-            <a:ext cx="1371600" cy="365760"/>
+            <a:off x="11186160" y="6035040"/>
+            <a:ext cx="548640" cy="365760"/>
           </a:xfrm>
         </p:spPr>
         <p:txBody>
@@ -7710,7 +7710,7 @@
             <a:r>
               <a:rPr sz="4200" b="1" i="0">
                 <a:solidFill>
-                  <a:srgbClr val="8FC1F0"/>
+                  <a:srgbClr val="F0A202"/>
                 </a:solidFill>
                 <a:latin typeface="Arial"/>
               </a:rPr>
@@ -8405,8 +8405,8 @@
         </p:nvSpPr>
         <p:spPr>
           <a:xfrm>
-            <a:off x="10363200" y="6035040"/>
-            <a:ext cx="1371600" cy="365760"/>
+            <a:off x="11186160" y="6035040"/>
+            <a:ext cx="548640" cy="365760"/>
           </a:xfrm>
         </p:spPr>
         <p:txBody>
@@ -8449,7 +8449,7 @@
             <a:r>
               <a:rPr sz="4200" b="1" i="0">
                 <a:solidFill>
-                  <a:srgbClr val="8FC1F0"/>
+                  <a:srgbClr val="F0A202"/>
                 </a:solidFill>
                 <a:latin typeface="Arial"/>
               </a:rPr>
@@ -9001,8 +9001,8 @@
         </p:nvSpPr>
         <p:spPr>
           <a:xfrm>
-            <a:off x="10363200" y="6035040"/>
-            <a:ext cx="1371600" cy="365760"/>
+            <a:off x="11186160" y="6035040"/>
+            <a:ext cx="548640" cy="365760"/>
           </a:xfrm>
         </p:spPr>
         <p:txBody>
@@ -9045,7 +9045,7 @@
             <a:r>
               <a:rPr sz="4200" b="1" i="0">
                 <a:solidFill>
-                  <a:srgbClr val="8FC1F0"/>
+                  <a:srgbClr val="F0A202"/>
                 </a:solidFill>
                 <a:latin typeface="Arial"/>
               </a:rPr>
@@ -9691,8 +9691,8 @@
         </p:nvSpPr>
         <p:spPr>
           <a:xfrm>
-            <a:off x="10363200" y="6035040"/>
-            <a:ext cx="1371600" cy="365760"/>
+            <a:off x="11186160" y="6035040"/>
+            <a:ext cx="548640" cy="365760"/>
           </a:xfrm>
         </p:spPr>
         <p:txBody>
@@ -9735,7 +9735,7 @@
             <a:r>
               <a:rPr sz="4200" b="1" i="0">
                 <a:solidFill>
-                  <a:srgbClr val="8FC1F0"/>
+                  <a:srgbClr val="F0A202"/>
                 </a:solidFill>
                 <a:latin typeface="Arial"/>
               </a:rPr>
@@ -10223,8 +10223,8 @@
         </p:nvSpPr>
         <p:spPr>
           <a:xfrm>
-            <a:off x="10363200" y="6035040"/>
-            <a:ext cx="1371600" cy="365760"/>
+            <a:off x="11186160" y="6035040"/>
+            <a:ext cx="548640" cy="365760"/>
           </a:xfrm>
         </p:spPr>
         <p:txBody>
@@ -10267,7 +10267,7 @@
             <a:r>
               <a:rPr sz="4200" b="1" i="0">
                 <a:solidFill>
-                  <a:srgbClr val="8FC1F0"/>
+                  <a:srgbClr val="F0A202"/>
                 </a:solidFill>
                 <a:latin typeface="Arial"/>
               </a:rPr>
@@ -10898,8 +10898,8 @@
         </p:nvSpPr>
         <p:spPr>
           <a:xfrm>
-            <a:off x="10363200" y="6035040"/>
-            <a:ext cx="1371600" cy="365760"/>
+            <a:off x="11186160" y="6035040"/>
+            <a:ext cx="548640" cy="365760"/>
           </a:xfrm>
         </p:spPr>
         <p:txBody>
@@ -10942,7 +10942,7 @@
             <a:r>
               <a:rPr sz="4200" b="1" i="0">
                 <a:solidFill>
-                  <a:srgbClr val="8FC1F0"/>
+                  <a:srgbClr val="F0A202"/>
                 </a:solidFill>
                 <a:latin typeface="Arial"/>
               </a:rPr>
@@ -11430,8 +11430,8 @@
         </p:nvSpPr>
         <p:spPr>
           <a:xfrm>
-            <a:off x="10363200" y="6035040"/>
-            <a:ext cx="1371600" cy="365760"/>
+            <a:off x="11186160" y="6035040"/>
+            <a:ext cx="548640" cy="365760"/>
           </a:xfrm>
         </p:spPr>
         <p:txBody>
@@ -11474,7 +11474,7 @@
             <a:r>
               <a:rPr sz="4200" b="1" i="0">
                 <a:solidFill>
-                  <a:srgbClr val="8FC1F0"/>
+                  <a:srgbClr val="F0A202"/>
                 </a:solidFill>
                 <a:latin typeface="Arial"/>
               </a:rPr>
@@ -11809,8 +11809,8 @@
         </p:nvSpPr>
         <p:spPr>
           <a:xfrm>
-            <a:off x="10363200" y="6035040"/>
-            <a:ext cx="1371600" cy="365760"/>
+            <a:off x="11186160" y="6035040"/>
+            <a:ext cx="548640" cy="365760"/>
           </a:xfrm>
         </p:spPr>
         <p:txBody>
@@ -11853,7 +11853,7 @@
             <a:r>
               <a:rPr sz="4200" b="1" i="0">
                 <a:solidFill>
-                  <a:srgbClr val="8FC1F0"/>
+                  <a:srgbClr val="F0A202"/>
                 </a:solidFill>
                 <a:latin typeface="Arial"/>
               </a:rPr>
@@ -12230,8 +12230,8 @@
         </p:nvSpPr>
         <p:spPr>
           <a:xfrm>
-            <a:off x="10363200" y="6035040"/>
-            <a:ext cx="1371600" cy="365760"/>
+            <a:off x="11186160" y="6035040"/>
+            <a:ext cx="548640" cy="365760"/>
           </a:xfrm>
         </p:spPr>
         <p:txBody>
@@ -12274,7 +12274,7 @@
             <a:r>
               <a:rPr sz="4200" b="1" i="0">
                 <a:solidFill>
-                  <a:srgbClr val="8FC1F0"/>
+                  <a:srgbClr val="F0A202"/>
                 </a:solidFill>
                 <a:latin typeface="Arial"/>
               </a:rPr>
@@ -12897,8 +12897,8 @@
         </p:nvSpPr>
         <p:spPr>
           <a:xfrm>
-            <a:off x="10363200" y="6035040"/>
-            <a:ext cx="1371600" cy="365760"/>
+            <a:off x="11186160" y="6035040"/>
+            <a:ext cx="548640" cy="365760"/>
           </a:xfrm>
         </p:spPr>
         <p:txBody>
@@ -12941,7 +12941,7 @@
             <a:r>
               <a:rPr sz="4200" b="1" i="0">
                 <a:solidFill>
-                  <a:srgbClr val="8FC1F0"/>
+                  <a:srgbClr val="F0A202"/>
                 </a:solidFill>
                 <a:latin typeface="Arial"/>
               </a:rPr>
@@ -13424,8 +13424,8 @@
         </p:nvSpPr>
         <p:spPr>
           <a:xfrm>
-            <a:off x="10363200" y="6035040"/>
-            <a:ext cx="1371600" cy="365760"/>
+            <a:off x="11186160" y="6035040"/>
+            <a:ext cx="548640" cy="365760"/>
           </a:xfrm>
         </p:spPr>
         <p:txBody>
@@ -13468,7 +13468,7 @@
             <a:r>
               <a:rPr sz="4200" b="1" i="0">
                 <a:solidFill>
-                  <a:srgbClr val="8FC1F0"/>
+                  <a:srgbClr val="F0A202"/>
                 </a:solidFill>
                 <a:latin typeface="Arial"/>
               </a:rPr>
@@ -15890,7 +15890,7 @@
             <a:r>
               <a:rPr sz="6000" b="1" i="0">
                 <a:solidFill>
-                  <a:srgbClr val="8FC1F0"/>
+                  <a:srgbClr val="F0A202"/>
                 </a:solidFill>
                 <a:latin typeface="Arial"/>
               </a:rPr>
@@ -15951,7 +15951,7 @@
             <a:r>
               <a:rPr sz="4200" b="1" i="0">
                 <a:solidFill>
-                  <a:srgbClr val="E7EDF3"/>
+                  <a:srgbClr val="F0A202"/>
                 </a:solidFill>
                 <a:latin typeface="Arial"/>
               </a:rPr>
@@ -16075,21 +16075,21 @@
         </p:nvSpPr>
         <p:spPr>
           <a:xfrm>
-            <a:off x="10363200" y="6035040"/>
-            <a:ext cx="1371600" cy="365760"/>
-          </a:xfrm>
-          <a:prstGeom prst="rect">
-            <a:avLst/>
-          </a:prstGeom>
-          <a:noFill/>
-        </p:spPr>
-        <p:txBody>
-          <a:bodyPr wrap="none" lIns="0" rIns="0">
-            <a:noAutofit/>
-          </a:bodyPr>
-          <a:lstStyle/>
-          <a:p>
-            <a:pPr algn="l"/>
+            <a:off x="11186160" y="6035040"/>
+            <a:ext cx="548640" cy="365760"/>
+          </a:xfrm>
+          <a:prstGeom prst="rect">
+            <a:avLst/>
+          </a:prstGeom>
+          <a:noFill/>
+        </p:spPr>
+        <p:txBody>
+          <a:bodyPr wrap="none" lIns="0" rIns="0">
+            <a:noAutofit/>
+          </a:bodyPr>
+          <a:lstStyle/>
+          <a:p>
+            <a:pPr algn="r"/>
             <a:fld id="{4B0E1F8A-6C1D-4E2A-9F3B-7A5C8D2E1F60}" type="slidenum">
               <a:rPr sz="1600" b="0" i="0">
                 <a:solidFill>
@@ -16154,7 +16154,7 @@
             <a:r>
               <a:rPr sz="4200" b="1" i="0">
                 <a:solidFill>
-                  <a:srgbClr val="E7EDF3"/>
+                  <a:srgbClr val="F0A202"/>
                 </a:solidFill>
                 <a:latin typeface="Arial"/>
               </a:rPr>
@@ -16348,21 +16348,21 @@
         </p:nvSpPr>
         <p:spPr>
           <a:xfrm>
-            <a:off x="10363200" y="6035040"/>
-            <a:ext cx="1371600" cy="365760"/>
-          </a:xfrm>
-          <a:prstGeom prst="rect">
-            <a:avLst/>
-          </a:prstGeom>
-          <a:noFill/>
-        </p:spPr>
-        <p:txBody>
-          <a:bodyPr wrap="none" lIns="0" rIns="0">
-            <a:noAutofit/>
-          </a:bodyPr>
-          <a:lstStyle/>
-          <a:p>
-            <a:pPr algn="l"/>
+            <a:off x="11186160" y="6035040"/>
+            <a:ext cx="548640" cy="365760"/>
+          </a:xfrm>
+          <a:prstGeom prst="rect">
+            <a:avLst/>
+          </a:prstGeom>
+          <a:noFill/>
+        </p:spPr>
+        <p:txBody>
+          <a:bodyPr wrap="none" lIns="0" rIns="0">
+            <a:noAutofit/>
+          </a:bodyPr>
+          <a:lstStyle/>
+          <a:p>
+            <a:pPr algn="r"/>
             <a:fld id="{4B0E1F8A-6C1D-4E2A-9F3B-7A5C8D2E1F60}" type="slidenum">
               <a:rPr sz="1600" b="0" i="0">
                 <a:solidFill>
@@ -16506,7 +16506,7 @@
             <a:r>
               <a:rPr sz="4200" b="1" i="0">
                 <a:solidFill>
-                  <a:srgbClr val="E7EDF3"/>
+                  <a:srgbClr val="F0A202"/>
                 </a:solidFill>
                 <a:latin typeface="Arial"/>
               </a:rPr>
@@ -16525,21 +16525,21 @@
         </p:nvSpPr>
         <p:spPr>
           <a:xfrm>
-            <a:off x="10363200" y="6035040"/>
-            <a:ext cx="1371600" cy="365760"/>
-          </a:xfrm>
-          <a:prstGeom prst="rect">
-            <a:avLst/>
-          </a:prstGeom>
-          <a:noFill/>
-        </p:spPr>
-        <p:txBody>
-          <a:bodyPr wrap="none" lIns="0" rIns="0">
-            <a:noAutofit/>
-          </a:bodyPr>
-          <a:lstStyle/>
-          <a:p>
-            <a:pPr algn="l"/>
+            <a:off x="11186160" y="6035040"/>
+            <a:ext cx="548640" cy="365760"/>
+          </a:xfrm>
+          <a:prstGeom prst="rect">
+            <a:avLst/>
+          </a:prstGeom>
+          <a:noFill/>
+        </p:spPr>
+        <p:txBody>
+          <a:bodyPr wrap="none" lIns="0" rIns="0">
+            <a:noAutofit/>
+          </a:bodyPr>
+          <a:lstStyle/>
+          <a:p>
+            <a:pPr algn="r"/>
             <a:fld id="{4B0E1F8A-6C1D-4E2A-9F3B-7A5C8D2E1F60}" type="slidenum">
               <a:rPr sz="1600" b="0" i="0">
                 <a:solidFill>
@@ -16702,21 +16702,21 @@
         </p:nvSpPr>
         <p:spPr>
           <a:xfrm>
-            <a:off x="10363200" y="6035040"/>
-            <a:ext cx="1371600" cy="365760"/>
-          </a:xfrm>
-          <a:prstGeom prst="rect">
-            <a:avLst/>
-          </a:prstGeom>
-          <a:noFill/>
-        </p:spPr>
-        <p:txBody>
-          <a:bodyPr wrap="none" lIns="0" rIns="0">
-            <a:noAutofit/>
-          </a:bodyPr>
-          <a:lstStyle/>
-          <a:p>
-            <a:pPr algn="l"/>
+            <a:off x="11186160" y="6035040"/>
+            <a:ext cx="548640" cy="365760"/>
+          </a:xfrm>
+          <a:prstGeom prst="rect">
+            <a:avLst/>
+          </a:prstGeom>
+          <a:noFill/>
+        </p:spPr>
+        <p:txBody>
+          <a:bodyPr wrap="none" lIns="0" rIns="0">
+            <a:noAutofit/>
+          </a:bodyPr>
+          <a:lstStyle/>
+          <a:p>
+            <a:pPr algn="r"/>
             <a:fld id="{4B0E1F8A-6C1D-4E2A-9F3B-7A5C8D2E1F60}" type="slidenum">
               <a:rPr sz="1600" b="0" i="0">
                 <a:solidFill>
@@ -16879,21 +16879,21 @@
         </p:nvSpPr>
         <p:spPr>
           <a:xfrm>
-            <a:off x="10363200" y="6035040"/>
-            <a:ext cx="1371600" cy="365760"/>
-          </a:xfrm>
-          <a:prstGeom prst="rect">
-            <a:avLst/>
-          </a:prstGeom>
-          <a:noFill/>
-        </p:spPr>
-        <p:txBody>
-          <a:bodyPr wrap="none" lIns="0" rIns="0">
-            <a:noAutofit/>
-          </a:bodyPr>
-          <a:lstStyle/>
-          <a:p>
-            <a:pPr algn="l"/>
+            <a:off x="11186160" y="6035040"/>
+            <a:ext cx="548640" cy="365760"/>
+          </a:xfrm>
+          <a:prstGeom prst="rect">
+            <a:avLst/>
+          </a:prstGeom>
+          <a:noFill/>
+        </p:spPr>
+        <p:txBody>
+          <a:bodyPr wrap="none" lIns="0" rIns="0">
+            <a:noAutofit/>
+          </a:bodyPr>
+          <a:lstStyle/>
+          <a:p>
+            <a:pPr algn="r"/>
             <a:fld id="{4B0E1F8A-6C1D-4E2A-9F3B-7A5C8D2E1F60}" type="slidenum">
               <a:rPr sz="1600" b="0" i="0">
                 <a:solidFill>
@@ -17354,21 +17354,21 @@
         </p:nvSpPr>
         <p:spPr>
           <a:xfrm>
-            <a:off x="10363200" y="6035040"/>
-            <a:ext cx="1371600" cy="365760"/>
-          </a:xfrm>
-          <a:prstGeom prst="rect">
-            <a:avLst/>
-          </a:prstGeom>
-          <a:noFill/>
-        </p:spPr>
-        <p:txBody>
-          <a:bodyPr wrap="none" lIns="0" rIns="0">
-            <a:noAutofit/>
-          </a:bodyPr>
-          <a:lstStyle/>
-          <a:p>
-            <a:pPr algn="l"/>
+            <a:off x="11186160" y="6035040"/>
+            <a:ext cx="548640" cy="365760"/>
+          </a:xfrm>
+          <a:prstGeom prst="rect">
+            <a:avLst/>
+          </a:prstGeom>
+          <a:noFill/>
+        </p:spPr>
+        <p:txBody>
+          <a:bodyPr wrap="none" lIns="0" rIns="0">
+            <a:noAutofit/>
+          </a:bodyPr>
+          <a:lstStyle/>
+          <a:p>
+            <a:pPr algn="r"/>
             <a:fld id="{4B0E1F8A-6C1D-4E2A-9F3B-7A5C8D2E1F60}" type="slidenum">
               <a:rPr sz="1600" b="0" i="0">
                 <a:solidFill>
@@ -17433,7 +17433,7 @@
             <a:r>
               <a:rPr sz="4200" b="1" i="0">
                 <a:solidFill>
-                  <a:srgbClr val="8FC1F0"/>
+                  <a:srgbClr val="F0A202"/>
                 </a:solidFill>
                 <a:latin typeface="Arial"/>
               </a:rPr>
@@ -17820,21 +17820,21 @@
         </p:nvSpPr>
         <p:spPr>
           <a:xfrm>
-            <a:off x="10363200" y="6035040"/>
-            <a:ext cx="1371600" cy="365760"/>
-          </a:xfrm>
-          <a:prstGeom prst="rect">
-            <a:avLst/>
-          </a:prstGeom>
-          <a:noFill/>
-        </p:spPr>
-        <p:txBody>
-          <a:bodyPr wrap="none" lIns="0" rIns="0">
-            <a:noAutofit/>
-          </a:bodyPr>
-          <a:lstStyle/>
-          <a:p>
-            <a:pPr algn="l"/>
+            <a:off x="11186160" y="6035040"/>
+            <a:ext cx="548640" cy="365760"/>
+          </a:xfrm>
+          <a:prstGeom prst="rect">
+            <a:avLst/>
+          </a:prstGeom>
+          <a:noFill/>
+        </p:spPr>
+        <p:txBody>
+          <a:bodyPr wrap="none" lIns="0" rIns="0">
+            <a:noAutofit/>
+          </a:bodyPr>
+          <a:lstStyle/>
+          <a:p>
+            <a:pPr algn="r"/>
             <a:fld id="{4B0E1F8A-6C1D-4E2A-9F3B-7A5C8D2E1F60}" type="slidenum">
               <a:rPr sz="1600" b="0" i="0">
                 <a:solidFill>
@@ -17899,7 +17899,7 @@
             <a:r>
               <a:rPr sz="4200" b="1" i="0">
                 <a:solidFill>
-                  <a:srgbClr val="E7EDF3"/>
+                  <a:srgbClr val="F0A202"/>
                 </a:solidFill>
                 <a:latin typeface="Arial"/>
               </a:rPr>
@@ -18023,21 +18023,21 @@
         </p:nvSpPr>
         <p:spPr>
           <a:xfrm>
-            <a:off x="10363200" y="6035040"/>
-            <a:ext cx="1371600" cy="365760"/>
-          </a:xfrm>
-          <a:prstGeom prst="rect">
-            <a:avLst/>
-          </a:prstGeom>
-          <a:noFill/>
-        </p:spPr>
-        <p:txBody>
-          <a:bodyPr wrap="none" lIns="0" rIns="0">
-            <a:noAutofit/>
-          </a:bodyPr>
-          <a:lstStyle/>
-          <a:p>
-            <a:pPr algn="l"/>
+            <a:off x="11186160" y="6035040"/>
+            <a:ext cx="548640" cy="365760"/>
+          </a:xfrm>
+          <a:prstGeom prst="rect">
+            <a:avLst/>
+          </a:prstGeom>
+          <a:noFill/>
+        </p:spPr>
+        <p:txBody>
+          <a:bodyPr wrap="none" lIns="0" rIns="0">
+            <a:noAutofit/>
+          </a:bodyPr>
+          <a:lstStyle/>
+          <a:p>
+            <a:pPr algn="r"/>
             <a:fld id="{4B0E1F8A-6C1D-4E2A-9F3B-7A5C8D2E1F60}" type="slidenum">
               <a:rPr sz="1600" b="0" i="0">
                 <a:solidFill>
@@ -18102,7 +18102,7 @@
             <a:r>
               <a:rPr sz="4200" b="1" i="0">
                 <a:solidFill>
-                  <a:srgbClr val="8FC1F0"/>
+                  <a:srgbClr val="F0A202"/>
                 </a:solidFill>
                 <a:latin typeface="Arial"/>
               </a:rPr>
@@ -18331,21 +18331,21 @@
         </p:nvSpPr>
         <p:spPr>
           <a:xfrm>
-            <a:off x="10363200" y="6035040"/>
-            <a:ext cx="1371600" cy="365760"/>
-          </a:xfrm>
-          <a:prstGeom prst="rect">
-            <a:avLst/>
-          </a:prstGeom>
-          <a:noFill/>
-        </p:spPr>
-        <p:txBody>
-          <a:bodyPr wrap="none" lIns="0" rIns="0">
-            <a:noAutofit/>
-          </a:bodyPr>
-          <a:lstStyle/>
-          <a:p>
-            <a:pPr algn="l"/>
+            <a:off x="11186160" y="6035040"/>
+            <a:ext cx="548640" cy="365760"/>
+          </a:xfrm>
+          <a:prstGeom prst="rect">
+            <a:avLst/>
+          </a:prstGeom>
+          <a:noFill/>
+        </p:spPr>
+        <p:txBody>
+          <a:bodyPr wrap="none" lIns="0" rIns="0">
+            <a:noAutofit/>
+          </a:bodyPr>
+          <a:lstStyle/>
+          <a:p>
+            <a:pPr algn="r"/>
             <a:fld id="{4B0E1F8A-6C1D-4E2A-9F3B-7A5C8D2E1F60}" type="slidenum">
               <a:rPr sz="1600" b="0" i="0">
                 <a:solidFill>
@@ -18410,7 +18410,7 @@
             <a:r>
               <a:rPr sz="4200" b="1" i="0">
                 <a:solidFill>
-                  <a:srgbClr val="E7EDF3"/>
+                  <a:srgbClr val="F0A202"/>
                 </a:solidFill>
                 <a:latin typeface="Arial"/>
               </a:rPr>
@@ -18534,21 +18534,21 @@
         </p:nvSpPr>
         <p:spPr>
           <a:xfrm>
-            <a:off x="10363200" y="6035040"/>
-            <a:ext cx="1371600" cy="365760"/>
-          </a:xfrm>
-          <a:prstGeom prst="rect">
-            <a:avLst/>
-          </a:prstGeom>
-          <a:noFill/>
-        </p:spPr>
-        <p:txBody>
-          <a:bodyPr wrap="none" lIns="0" rIns="0">
-            <a:noAutofit/>
-          </a:bodyPr>
-          <a:lstStyle/>
-          <a:p>
-            <a:pPr algn="l"/>
+            <a:off x="11186160" y="6035040"/>
+            <a:ext cx="548640" cy="365760"/>
+          </a:xfrm>
+          <a:prstGeom prst="rect">
+            <a:avLst/>
+          </a:prstGeom>
+          <a:noFill/>
+        </p:spPr>
+        <p:txBody>
+          <a:bodyPr wrap="none" lIns="0" rIns="0">
+            <a:noAutofit/>
+          </a:bodyPr>
+          <a:lstStyle/>
+          <a:p>
+            <a:pPr algn="r"/>
             <a:fld id="{4B0E1F8A-6C1D-4E2A-9F3B-7A5C8D2E1F60}" type="slidenum">
               <a:rPr sz="1600" b="0" i="0">
                 <a:solidFill>
@@ -18613,7 +18613,7 @@
             <a:r>
               <a:rPr sz="4200" b="1" i="0">
                 <a:solidFill>
-                  <a:srgbClr val="8FC1F0"/>
+                  <a:srgbClr val="F0A202"/>
                 </a:solidFill>
                 <a:latin typeface="Arial"/>
               </a:rPr>
@@ -19228,21 +19228,21 @@
         </p:nvSpPr>
         <p:spPr>
           <a:xfrm>
-            <a:off x="10363200" y="6035040"/>
-            <a:ext cx="1371600" cy="365760"/>
-          </a:xfrm>
-          <a:prstGeom prst="rect">
-            <a:avLst/>
-          </a:prstGeom>
-          <a:noFill/>
-        </p:spPr>
-        <p:txBody>
-          <a:bodyPr wrap="none" lIns="0" rIns="0">
-            <a:noAutofit/>
-          </a:bodyPr>
-          <a:lstStyle/>
-          <a:p>
-            <a:pPr algn="l"/>
+            <a:off x="11186160" y="6035040"/>
+            <a:ext cx="548640" cy="365760"/>
+          </a:xfrm>
+          <a:prstGeom prst="rect">
+            <a:avLst/>
+          </a:prstGeom>
+          <a:noFill/>
+        </p:spPr>
+        <p:txBody>
+          <a:bodyPr wrap="none" lIns="0" rIns="0">
+            <a:noAutofit/>
+          </a:bodyPr>
+          <a:lstStyle/>
+          <a:p>
+            <a:pPr algn="r"/>
             <a:fld id="{4B0E1F8A-6C1D-4E2A-9F3B-7A5C8D2E1F60}" type="slidenum">
               <a:rPr sz="1600" b="0" i="0">
                 <a:solidFill>
@@ -19386,7 +19386,7 @@
             <a:r>
               <a:rPr sz="4200" b="1" i="0">
                 <a:solidFill>
-                  <a:srgbClr val="E7EDF3"/>
+                  <a:srgbClr val="F0A202"/>
                 </a:solidFill>
                 <a:latin typeface="Arial"/>
               </a:rPr>
@@ -19405,21 +19405,21 @@
         </p:nvSpPr>
         <p:spPr>
           <a:xfrm>
-            <a:off x="10363200" y="6035040"/>
-            <a:ext cx="1371600" cy="365760"/>
-          </a:xfrm>
-          <a:prstGeom prst="rect">
-            <a:avLst/>
-          </a:prstGeom>
-          <a:noFill/>
-        </p:spPr>
-        <p:txBody>
-          <a:bodyPr wrap="none" lIns="0" rIns="0">
-            <a:noAutofit/>
-          </a:bodyPr>
-          <a:lstStyle/>
-          <a:p>
-            <a:pPr algn="l"/>
+            <a:off x="11186160" y="6035040"/>
+            <a:ext cx="548640" cy="365760"/>
+          </a:xfrm>
+          <a:prstGeom prst="rect">
+            <a:avLst/>
+          </a:prstGeom>
+          <a:noFill/>
+        </p:spPr>
+        <p:txBody>
+          <a:bodyPr wrap="none" lIns="0" rIns="0">
+            <a:noAutofit/>
+          </a:bodyPr>
+          <a:lstStyle/>
+          <a:p>
+            <a:pPr algn="r"/>
             <a:fld id="{4B0E1F8A-6C1D-4E2A-9F3B-7A5C8D2E1F60}" type="slidenum">
               <a:rPr sz="1600" b="0" i="0">
                 <a:solidFill>
@@ -19484,7 +19484,7 @@
             <a:r>
               <a:rPr sz="4200" b="1" i="0">
                 <a:solidFill>
-                  <a:srgbClr val="8FC1F0"/>
+                  <a:srgbClr val="F0A202"/>
                 </a:solidFill>
                 <a:latin typeface="Arial"/>
               </a:rPr>
@@ -20074,21 +20074,21 @@
         </p:nvSpPr>
         <p:spPr>
           <a:xfrm>
-            <a:off x="10363200" y="6035040"/>
-            <a:ext cx="1371600" cy="365760"/>
-          </a:xfrm>
-          <a:prstGeom prst="rect">
-            <a:avLst/>
-          </a:prstGeom>
-          <a:noFill/>
-        </p:spPr>
-        <p:txBody>
-          <a:bodyPr wrap="none" lIns="0" rIns="0">
-            <a:noAutofit/>
-          </a:bodyPr>
-          <a:lstStyle/>
-          <a:p>
-            <a:pPr algn="l"/>
+            <a:off x="11186160" y="6035040"/>
+            <a:ext cx="548640" cy="365760"/>
+          </a:xfrm>
+          <a:prstGeom prst="rect">
+            <a:avLst/>
+          </a:prstGeom>
+          <a:noFill/>
+        </p:spPr>
+        <p:txBody>
+          <a:bodyPr wrap="none" lIns="0" rIns="0">
+            <a:noAutofit/>
+          </a:bodyPr>
+          <a:lstStyle/>
+          <a:p>
+            <a:pPr algn="r"/>
             <a:fld id="{4B0E1F8A-6C1D-4E2A-9F3B-7A5C8D2E1F60}" type="slidenum">
               <a:rPr sz="1600" b="0" i="0">
                 <a:solidFill>
@@ -20153,7 +20153,7 @@
             <a:r>
               <a:rPr sz="4200" b="1" i="0">
                 <a:solidFill>
-                  <a:srgbClr val="8FC1F0"/>
+                  <a:srgbClr val="F0A202"/>
                 </a:solidFill>
                 <a:latin typeface="Arial"/>
               </a:rPr>
@@ -20540,21 +20540,21 @@
         </p:nvSpPr>
         <p:spPr>
           <a:xfrm>
-            <a:off x="10363200" y="6035040"/>
-            <a:ext cx="1371600" cy="365760"/>
-          </a:xfrm>
-          <a:prstGeom prst="rect">
-            <a:avLst/>
-          </a:prstGeom>
-          <a:noFill/>
-        </p:spPr>
-        <p:txBody>
-          <a:bodyPr wrap="none" lIns="0" rIns="0">
-            <a:noAutofit/>
-          </a:bodyPr>
-          <a:lstStyle/>
-          <a:p>
-            <a:pPr algn="l"/>
+            <a:off x="11186160" y="6035040"/>
+            <a:ext cx="548640" cy="365760"/>
+          </a:xfrm>
+          <a:prstGeom prst="rect">
+            <a:avLst/>
+          </a:prstGeom>
+          <a:noFill/>
+        </p:spPr>
+        <p:txBody>
+          <a:bodyPr wrap="none" lIns="0" rIns="0">
+            <a:noAutofit/>
+          </a:bodyPr>
+          <a:lstStyle/>
+          <a:p>
+            <a:pPr algn="r"/>
             <a:fld id="{4B0E1F8A-6C1D-4E2A-9F3B-7A5C8D2E1F60}" type="slidenum">
               <a:rPr sz="1600" b="0" i="0">
                 <a:solidFill>
@@ -20619,7 +20619,7 @@
             <a:r>
               <a:rPr sz="4200" b="1" i="0">
                 <a:solidFill>
-                  <a:srgbClr val="E7EDF3"/>
+                  <a:srgbClr val="F0A202"/>
                 </a:solidFill>
                 <a:latin typeface="Arial"/>
               </a:rPr>
@@ -20778,21 +20778,21 @@
         </p:nvSpPr>
         <p:spPr>
           <a:xfrm>
-            <a:off x="10363200" y="6035040"/>
-            <a:ext cx="1371600" cy="365760"/>
-          </a:xfrm>
-          <a:prstGeom prst="rect">
-            <a:avLst/>
-          </a:prstGeom>
-          <a:noFill/>
-        </p:spPr>
-        <p:txBody>
-          <a:bodyPr wrap="none" lIns="0" rIns="0">
-            <a:noAutofit/>
-          </a:bodyPr>
-          <a:lstStyle/>
-          <a:p>
-            <a:pPr algn="l"/>
+            <a:off x="11186160" y="6035040"/>
+            <a:ext cx="548640" cy="365760"/>
+          </a:xfrm>
+          <a:prstGeom prst="rect">
+            <a:avLst/>
+          </a:prstGeom>
+          <a:noFill/>
+        </p:spPr>
+        <p:txBody>
+          <a:bodyPr wrap="none" lIns="0" rIns="0">
+            <a:noAutofit/>
+          </a:bodyPr>
+          <a:lstStyle/>
+          <a:p>
+            <a:pPr algn="r"/>
             <a:fld id="{4B0E1F8A-6C1D-4E2A-9F3B-7A5C8D2E1F60}" type="slidenum">
               <a:rPr sz="1600" b="0" i="0">
                 <a:solidFill>
@@ -20955,21 +20955,21 @@
         </p:nvSpPr>
         <p:spPr>
           <a:xfrm>
-            <a:off x="10363200" y="6035040"/>
-            <a:ext cx="1371600" cy="365760"/>
-          </a:xfrm>
-          <a:prstGeom prst="rect">
-            <a:avLst/>
-          </a:prstGeom>
-          <a:noFill/>
-        </p:spPr>
-        <p:txBody>
-          <a:bodyPr wrap="none" lIns="0" rIns="0">
-            <a:noAutofit/>
-          </a:bodyPr>
-          <a:lstStyle/>
-          <a:p>
-            <a:pPr algn="l"/>
+            <a:off x="11186160" y="6035040"/>
+            <a:ext cx="548640" cy="365760"/>
+          </a:xfrm>
+          <a:prstGeom prst="rect">
+            <a:avLst/>
+          </a:prstGeom>
+          <a:noFill/>
+        </p:spPr>
+        <p:txBody>
+          <a:bodyPr wrap="none" lIns="0" rIns="0">
+            <a:noAutofit/>
+          </a:bodyPr>
+          <a:lstStyle/>
+          <a:p>
+            <a:pPr algn="r"/>
             <a:fld id="{4B0E1F8A-6C1D-4E2A-9F3B-7A5C8D2E1F60}" type="slidenum">
               <a:rPr sz="1600" b="0" i="0">
                 <a:solidFill>
@@ -21034,7 +21034,7 @@
             <a:r>
               <a:rPr sz="4200" b="1" i="0">
                 <a:solidFill>
-                  <a:srgbClr val="E7EDF3"/>
+                  <a:srgbClr val="F0A202"/>
                 </a:solidFill>
                 <a:latin typeface="Arial"/>
               </a:rPr>
@@ -21158,21 +21158,21 @@
         </p:nvSpPr>
         <p:spPr>
           <a:xfrm>
-            <a:off x="10363200" y="6035040"/>
-            <a:ext cx="1371600" cy="365760"/>
-          </a:xfrm>
-          <a:prstGeom prst="rect">
-            <a:avLst/>
-          </a:prstGeom>
-          <a:noFill/>
-        </p:spPr>
-        <p:txBody>
-          <a:bodyPr wrap="none" lIns="0" rIns="0">
-            <a:noAutofit/>
-          </a:bodyPr>
-          <a:lstStyle/>
-          <a:p>
-            <a:pPr algn="l"/>
+            <a:off x="11186160" y="6035040"/>
+            <a:ext cx="548640" cy="365760"/>
+          </a:xfrm>
+          <a:prstGeom prst="rect">
+            <a:avLst/>
+          </a:prstGeom>
+          <a:noFill/>
+        </p:spPr>
+        <p:txBody>
+          <a:bodyPr wrap="none" lIns="0" rIns="0">
+            <a:noAutofit/>
+          </a:bodyPr>
+          <a:lstStyle/>
+          <a:p>
+            <a:pPr algn="r"/>
             <a:fld id="{4B0E1F8A-6C1D-4E2A-9F3B-7A5C8D2E1F60}" type="slidenum">
               <a:rPr sz="1600" b="0" i="0">
                 <a:solidFill>
@@ -21237,7 +21237,7 @@
             <a:r>
               <a:rPr sz="4200" b="1" i="0">
                 <a:solidFill>
-                  <a:srgbClr val="E7EDF3"/>
+                  <a:srgbClr val="F0A202"/>
                 </a:solidFill>
                 <a:latin typeface="Arial"/>
               </a:rPr>
@@ -21396,21 +21396,21 @@
         </p:nvSpPr>
         <p:spPr>
           <a:xfrm>
-            <a:off x="10363200" y="6035040"/>
-            <a:ext cx="1371600" cy="365760"/>
-          </a:xfrm>
-          <a:prstGeom prst="rect">
-            <a:avLst/>
-          </a:prstGeom>
-          <a:noFill/>
-        </p:spPr>
-        <p:txBody>
-          <a:bodyPr wrap="none" lIns="0" rIns="0">
-            <a:noAutofit/>
-          </a:bodyPr>
-          <a:lstStyle/>
-          <a:p>
-            <a:pPr algn="l"/>
+            <a:off x="11186160" y="6035040"/>
+            <a:ext cx="548640" cy="365760"/>
+          </a:xfrm>
+          <a:prstGeom prst="rect">
+            <a:avLst/>
+          </a:prstGeom>
+          <a:noFill/>
+        </p:spPr>
+        <p:txBody>
+          <a:bodyPr wrap="none" lIns="0" rIns="0">
+            <a:noAutofit/>
+          </a:bodyPr>
+          <a:lstStyle/>
+          <a:p>
+            <a:pPr algn="r"/>
             <a:fld id="{4B0E1F8A-6C1D-4E2A-9F3B-7A5C8D2E1F60}" type="slidenum">
               <a:rPr sz="1600" b="0" i="0">
                 <a:solidFill>
@@ -21475,7 +21475,7 @@
             <a:r>
               <a:rPr sz="4200" b="1" i="0">
                 <a:solidFill>
-                  <a:srgbClr val="8FC1F0"/>
+                  <a:srgbClr val="F0A202"/>
                 </a:solidFill>
                 <a:latin typeface="Arial"/>
               </a:rPr>
@@ -21888,21 +21888,21 @@
         </p:nvSpPr>
         <p:spPr>
           <a:xfrm>
-            <a:off x="10363200" y="6035040"/>
-            <a:ext cx="1371600" cy="365760"/>
-          </a:xfrm>
-          <a:prstGeom prst="rect">
-            <a:avLst/>
-          </a:prstGeom>
-          <a:noFill/>
-        </p:spPr>
-        <p:txBody>
-          <a:bodyPr wrap="none" lIns="0" rIns="0">
-            <a:noAutofit/>
-          </a:bodyPr>
-          <a:lstStyle/>
-          <a:p>
-            <a:pPr algn="l"/>
+            <a:off x="11186160" y="6035040"/>
+            <a:ext cx="548640" cy="365760"/>
+          </a:xfrm>
+          <a:prstGeom prst="rect">
+            <a:avLst/>
+          </a:prstGeom>
+          <a:noFill/>
+        </p:spPr>
+        <p:txBody>
+          <a:bodyPr wrap="none" lIns="0" rIns="0">
+            <a:noAutofit/>
+          </a:bodyPr>
+          <a:lstStyle/>
+          <a:p>
+            <a:pPr algn="r"/>
             <a:fld id="{4B0E1F8A-6C1D-4E2A-9F3B-7A5C8D2E1F60}" type="slidenum">
               <a:rPr sz="1600" b="0" i="0">
                 <a:solidFill>
@@ -22046,7 +22046,7 @@
             <a:r>
               <a:rPr sz="4200" b="1" i="0">
                 <a:solidFill>
-                  <a:srgbClr val="E7EDF3"/>
+                  <a:srgbClr val="F0A202"/>
                 </a:solidFill>
                 <a:latin typeface="Arial"/>
               </a:rPr>
@@ -22065,21 +22065,21 @@
         </p:nvSpPr>
         <p:spPr>
           <a:xfrm>
-            <a:off x="10363200" y="6035040"/>
-            <a:ext cx="1371600" cy="365760"/>
-          </a:xfrm>
-          <a:prstGeom prst="rect">
-            <a:avLst/>
-          </a:prstGeom>
-          <a:noFill/>
-        </p:spPr>
-        <p:txBody>
-          <a:bodyPr wrap="none" lIns="0" rIns="0">
-            <a:noAutofit/>
-          </a:bodyPr>
-          <a:lstStyle/>
-          <a:p>
-            <a:pPr algn="l"/>
+            <a:off x="11186160" y="6035040"/>
+            <a:ext cx="548640" cy="365760"/>
+          </a:xfrm>
+          <a:prstGeom prst="rect">
+            <a:avLst/>
+          </a:prstGeom>
+          <a:noFill/>
+        </p:spPr>
+        <p:txBody>
+          <a:bodyPr wrap="none" lIns="0" rIns="0">
+            <a:noAutofit/>
+          </a:bodyPr>
+          <a:lstStyle/>
+          <a:p>
+            <a:pPr algn="r"/>
             <a:fld id="{4B0E1F8A-6C1D-4E2A-9F3B-7A5C8D2E1F60}" type="slidenum">
               <a:rPr sz="1600" b="0" i="0">
                 <a:solidFill>
@@ -23065,21 +23065,21 @@
         </p:nvSpPr>
         <p:spPr>
           <a:xfrm>
-            <a:off x="10363200" y="6035040"/>
-            <a:ext cx="1371600" cy="365760"/>
-          </a:xfrm>
-          <a:prstGeom prst="rect">
-            <a:avLst/>
-          </a:prstGeom>
-          <a:noFill/>
-        </p:spPr>
-        <p:txBody>
-          <a:bodyPr wrap="none" lIns="0" rIns="0">
-            <a:noAutofit/>
-          </a:bodyPr>
-          <a:lstStyle/>
-          <a:p>
-            <a:pPr algn="l"/>
+            <a:off x="11186160" y="6035040"/>
+            <a:ext cx="548640" cy="365760"/>
+          </a:xfrm>
+          <a:prstGeom prst="rect">
+            <a:avLst/>
+          </a:prstGeom>
+          <a:noFill/>
+        </p:spPr>
+        <p:txBody>
+          <a:bodyPr wrap="none" lIns="0" rIns="0">
+            <a:noAutofit/>
+          </a:bodyPr>
+          <a:lstStyle/>
+          <a:p>
+            <a:pPr algn="r"/>
             <a:fld id="{4B0E1F8A-6C1D-4E2A-9F3B-7A5C8D2E1F60}" type="slidenum">
               <a:rPr sz="1600" b="0" i="0">
                 <a:solidFill>
@@ -23144,7 +23144,7 @@
             <a:r>
               <a:rPr sz="4200" b="1" i="0">
                 <a:solidFill>
-                  <a:srgbClr val="E7EDF3"/>
+                  <a:srgbClr val="F0A202"/>
                 </a:solidFill>
                 <a:latin typeface="Arial"/>
               </a:rPr>
@@ -23478,21 +23478,21 @@
         </p:nvSpPr>
         <p:spPr>
           <a:xfrm>
-            <a:off x="10363200" y="6035040"/>
-            <a:ext cx="1371600" cy="365760"/>
-          </a:xfrm>
-          <a:prstGeom prst="rect">
-            <a:avLst/>
-          </a:prstGeom>
-          <a:noFill/>
-        </p:spPr>
-        <p:txBody>
-          <a:bodyPr wrap="none" lIns="0" rIns="0">
-            <a:noAutofit/>
-          </a:bodyPr>
-          <a:lstStyle/>
-          <a:p>
-            <a:pPr algn="l"/>
+            <a:off x="11186160" y="6035040"/>
+            <a:ext cx="548640" cy="365760"/>
+          </a:xfrm>
+          <a:prstGeom prst="rect">
+            <a:avLst/>
+          </a:prstGeom>
+          <a:noFill/>
+        </p:spPr>
+        <p:txBody>
+          <a:bodyPr wrap="none" lIns="0" rIns="0">
+            <a:noAutofit/>
+          </a:bodyPr>
+          <a:lstStyle/>
+          <a:p>
+            <a:pPr algn="r"/>
             <a:fld id="{4B0E1F8A-6C1D-4E2A-9F3B-7A5C8D2E1F60}" type="slidenum">
               <a:rPr sz="1600" b="0" i="0">
                 <a:solidFill>
@@ -23557,7 +23557,7 @@
             <a:r>
               <a:rPr sz="4200" b="1" i="0">
                 <a:solidFill>
-                  <a:srgbClr val="E7EDF3"/>
+                  <a:srgbClr val="F0A202"/>
                 </a:solidFill>
                 <a:latin typeface="Arial"/>
               </a:rPr>
@@ -23681,21 +23681,21 @@
         </p:nvSpPr>
         <p:spPr>
           <a:xfrm>
-            <a:off x="10363200" y="6035040"/>
-            <a:ext cx="1371600" cy="365760"/>
-          </a:xfrm>
-          <a:prstGeom prst="rect">
-            <a:avLst/>
-          </a:prstGeom>
-          <a:noFill/>
-        </p:spPr>
-        <p:txBody>
-          <a:bodyPr wrap="none" lIns="0" rIns="0">
-            <a:noAutofit/>
-          </a:bodyPr>
-          <a:lstStyle/>
-          <a:p>
-            <a:pPr algn="l"/>
+            <a:off x="11186160" y="6035040"/>
+            <a:ext cx="548640" cy="365760"/>
+          </a:xfrm>
+          <a:prstGeom prst="rect">
+            <a:avLst/>
+          </a:prstGeom>
+          <a:noFill/>
+        </p:spPr>
+        <p:txBody>
+          <a:bodyPr wrap="none" lIns="0" rIns="0">
+            <a:noAutofit/>
+          </a:bodyPr>
+          <a:lstStyle/>
+          <a:p>
+            <a:pPr algn="r"/>
             <a:fld id="{4B0E1F8A-6C1D-4E2A-9F3B-7A5C8D2E1F60}" type="slidenum">
               <a:rPr sz="1600" b="0" i="0">
                 <a:solidFill>
@@ -24611,21 +24611,21 @@
         </p:nvSpPr>
         <p:spPr>
           <a:xfrm>
-            <a:off x="10363200" y="6035040"/>
-            <a:ext cx="1371600" cy="365760"/>
-          </a:xfrm>
-          <a:prstGeom prst="rect">
-            <a:avLst/>
-          </a:prstGeom>
-          <a:noFill/>
-        </p:spPr>
-        <p:txBody>
-          <a:bodyPr wrap="none" lIns="0" rIns="0">
-            <a:noAutofit/>
-          </a:bodyPr>
-          <a:lstStyle/>
-          <a:p>
-            <a:pPr algn="l"/>
+            <a:off x="11186160" y="6035040"/>
+            <a:ext cx="548640" cy="365760"/>
+          </a:xfrm>
+          <a:prstGeom prst="rect">
+            <a:avLst/>
+          </a:prstGeom>
+          <a:noFill/>
+        </p:spPr>
+        <p:txBody>
+          <a:bodyPr wrap="none" lIns="0" rIns="0">
+            <a:noAutofit/>
+          </a:bodyPr>
+          <a:lstStyle/>
+          <a:p>
+            <a:pPr algn="r"/>
             <a:fld id="{4B0E1F8A-6C1D-4E2A-9F3B-7A5C8D2E1F60}" type="slidenum">
               <a:rPr sz="1600" b="0" i="0">
                 <a:solidFill>
@@ -25829,21 +25829,21 @@
         </p:nvSpPr>
         <p:spPr>
           <a:xfrm>
-            <a:off x="10363200" y="6035040"/>
-            <a:ext cx="1371600" cy="365760"/>
-          </a:xfrm>
-          <a:prstGeom prst="rect">
-            <a:avLst/>
-          </a:prstGeom>
-          <a:noFill/>
-        </p:spPr>
-        <p:txBody>
-          <a:bodyPr wrap="none" lIns="0" rIns="0">
-            <a:noAutofit/>
-          </a:bodyPr>
-          <a:lstStyle/>
-          <a:p>
-            <a:pPr algn="l"/>
+            <a:off x="11186160" y="6035040"/>
+            <a:ext cx="548640" cy="365760"/>
+          </a:xfrm>
+          <a:prstGeom prst="rect">
+            <a:avLst/>
+          </a:prstGeom>
+          <a:noFill/>
+        </p:spPr>
+        <p:txBody>
+          <a:bodyPr wrap="none" lIns="0" rIns="0">
+            <a:noAutofit/>
+          </a:bodyPr>
+          <a:lstStyle/>
+          <a:p>
+            <a:pPr algn="r"/>
             <a:fld id="{4B0E1F8A-6C1D-4E2A-9F3B-7A5C8D2E1F60}" type="slidenum">
               <a:rPr sz="1600" b="0" i="0">
                 <a:solidFill>
@@ -27249,21 +27249,21 @@
         </p:nvSpPr>
         <p:spPr>
           <a:xfrm>
-            <a:off x="10363200" y="6035040"/>
-            <a:ext cx="1371600" cy="365760"/>
-          </a:xfrm>
-          <a:prstGeom prst="rect">
-            <a:avLst/>
-          </a:prstGeom>
-          <a:noFill/>
-        </p:spPr>
-        <p:txBody>
-          <a:bodyPr wrap="none" lIns="0" rIns="0">
-            <a:noAutofit/>
-          </a:bodyPr>
-          <a:lstStyle/>
-          <a:p>
-            <a:pPr algn="l"/>
+            <a:off x="11186160" y="6035040"/>
+            <a:ext cx="548640" cy="365760"/>
+          </a:xfrm>
+          <a:prstGeom prst="rect">
+            <a:avLst/>
+          </a:prstGeom>
+          <a:noFill/>
+        </p:spPr>
+        <p:txBody>
+          <a:bodyPr wrap="none" lIns="0" rIns="0">
+            <a:noAutofit/>
+          </a:bodyPr>
+          <a:lstStyle/>
+          <a:p>
+            <a:pPr algn="r"/>
             <a:fld id="{4B0E1F8A-6C1D-4E2A-9F3B-7A5C8D2E1F60}" type="slidenum">
               <a:rPr sz="1600" b="0" i="0">
                 <a:solidFill>
@@ -27328,7 +27328,7 @@
             <a:r>
               <a:rPr sz="4200" b="1" i="0">
                 <a:solidFill>
-                  <a:srgbClr val="8FC1F0"/>
+                  <a:srgbClr val="F0A202"/>
                 </a:solidFill>
                 <a:latin typeface="Arial"/>
               </a:rPr>
@@ -27785,21 +27785,21 @@
         </p:nvSpPr>
         <p:spPr>
           <a:xfrm>
-            <a:off x="10363200" y="6035040"/>
-            <a:ext cx="1371600" cy="365760"/>
-          </a:xfrm>
-          <a:prstGeom prst="rect">
-            <a:avLst/>
-          </a:prstGeom>
-          <a:noFill/>
-        </p:spPr>
-        <p:txBody>
-          <a:bodyPr wrap="none" lIns="0" rIns="0">
-            <a:noAutofit/>
-          </a:bodyPr>
-          <a:lstStyle/>
-          <a:p>
-            <a:pPr algn="l"/>
+            <a:off x="11186160" y="6035040"/>
+            <a:ext cx="548640" cy="365760"/>
+          </a:xfrm>
+          <a:prstGeom prst="rect">
+            <a:avLst/>
+          </a:prstGeom>
+          <a:noFill/>
+        </p:spPr>
+        <p:txBody>
+          <a:bodyPr wrap="none" lIns="0" rIns="0">
+            <a:noAutofit/>
+          </a:bodyPr>
+          <a:lstStyle/>
+          <a:p>
+            <a:pPr algn="r"/>
             <a:fld id="{4B0E1F8A-6C1D-4E2A-9F3B-7A5C8D2E1F60}" type="slidenum">
               <a:rPr sz="1600" b="0" i="0">
                 <a:solidFill>
@@ -27864,7 +27864,7 @@
             <a:r>
               <a:rPr sz="4200" b="1" i="0">
                 <a:solidFill>
-                  <a:srgbClr val="8FC1F0"/>
+                  <a:srgbClr val="F0A202"/>
                 </a:solidFill>
                 <a:latin typeface="Arial"/>
               </a:rPr>
@@ -28251,21 +28251,21 @@
         </p:nvSpPr>
         <p:spPr>
           <a:xfrm>
-            <a:off x="10363200" y="6035040"/>
-            <a:ext cx="1371600" cy="365760"/>
-          </a:xfrm>
-          <a:prstGeom prst="rect">
-            <a:avLst/>
-          </a:prstGeom>
-          <a:noFill/>
-        </p:spPr>
-        <p:txBody>
-          <a:bodyPr wrap="none" lIns="0" rIns="0">
-            <a:noAutofit/>
-          </a:bodyPr>
-          <a:lstStyle/>
-          <a:p>
-            <a:pPr algn="l"/>
+            <a:off x="11186160" y="6035040"/>
+            <a:ext cx="548640" cy="365760"/>
+          </a:xfrm>
+          <a:prstGeom prst="rect">
+            <a:avLst/>
+          </a:prstGeom>
+          <a:noFill/>
+        </p:spPr>
+        <p:txBody>
+          <a:bodyPr wrap="none" lIns="0" rIns="0">
+            <a:noAutofit/>
+          </a:bodyPr>
+          <a:lstStyle/>
+          <a:p>
+            <a:pPr algn="r"/>
             <a:fld id="{4B0E1F8A-6C1D-4E2A-9F3B-7A5C8D2E1F60}" type="slidenum">
               <a:rPr sz="1600" b="0" i="0">
                 <a:solidFill>
@@ -28428,21 +28428,21 @@
         </p:nvSpPr>
         <p:spPr>
           <a:xfrm>
-            <a:off x="10363200" y="6035040"/>
-            <a:ext cx="1371600" cy="365760"/>
-          </a:xfrm>
-          <a:prstGeom prst="rect">
-            <a:avLst/>
-          </a:prstGeom>
-          <a:noFill/>
-        </p:spPr>
-        <p:txBody>
-          <a:bodyPr wrap="none" lIns="0" rIns="0">
-            <a:noAutofit/>
-          </a:bodyPr>
-          <a:lstStyle/>
-          <a:p>
-            <a:pPr algn="l"/>
+            <a:off x="11186160" y="6035040"/>
+            <a:ext cx="548640" cy="365760"/>
+          </a:xfrm>
+          <a:prstGeom prst="rect">
+            <a:avLst/>
+          </a:prstGeom>
+          <a:noFill/>
+        </p:spPr>
+        <p:txBody>
+          <a:bodyPr wrap="none" lIns="0" rIns="0">
+            <a:noAutofit/>
+          </a:bodyPr>
+          <a:lstStyle/>
+          <a:p>
+            <a:pPr algn="r"/>
             <a:fld id="{4B0E1F8A-6C1D-4E2A-9F3B-7A5C8D2E1F60}" type="slidenum">
               <a:rPr sz="1600" b="0" i="0">
                 <a:solidFill>
@@ -28586,7 +28586,7 @@
             <a:r>
               <a:rPr sz="4200" b="1" i="0">
                 <a:solidFill>
-                  <a:srgbClr val="E7EDF3"/>
+                  <a:srgbClr val="F0A202"/>
                 </a:solidFill>
                 <a:latin typeface="Arial"/>
               </a:rPr>
@@ -28605,21 +28605,21 @@
         </p:nvSpPr>
         <p:spPr>
           <a:xfrm>
-            <a:off x="10363200" y="6035040"/>
-            <a:ext cx="1371600" cy="365760"/>
-          </a:xfrm>
-          <a:prstGeom prst="rect">
-            <a:avLst/>
-          </a:prstGeom>
-          <a:noFill/>
-        </p:spPr>
-        <p:txBody>
-          <a:bodyPr wrap="none" lIns="0" rIns="0">
-            <a:noAutofit/>
-          </a:bodyPr>
-          <a:lstStyle/>
-          <a:p>
-            <a:pPr algn="l"/>
+            <a:off x="11186160" y="6035040"/>
+            <a:ext cx="548640" cy="365760"/>
+          </a:xfrm>
+          <a:prstGeom prst="rect">
+            <a:avLst/>
+          </a:prstGeom>
+          <a:noFill/>
+        </p:spPr>
+        <p:txBody>
+          <a:bodyPr wrap="none" lIns="0" rIns="0">
+            <a:noAutofit/>
+          </a:bodyPr>
+          <a:lstStyle/>
+          <a:p>
+            <a:pPr algn="r"/>
             <a:fld id="{4B0E1F8A-6C1D-4E2A-9F3B-7A5C8D2E1F60}" type="slidenum">
               <a:rPr sz="1600" b="0" i="0">
                 <a:solidFill>
@@ -28684,7 +28684,7 @@
             <a:r>
               <a:rPr sz="4200" b="1" i="0">
                 <a:solidFill>
-                  <a:srgbClr val="E7EDF3"/>
+                  <a:srgbClr val="F0A202"/>
                 </a:solidFill>
                 <a:latin typeface="Arial"/>
               </a:rPr>
@@ -28808,21 +28808,21 @@
         </p:nvSpPr>
         <p:spPr>
           <a:xfrm>
-            <a:off x="10363200" y="6035040"/>
-            <a:ext cx="1371600" cy="365760"/>
-          </a:xfrm>
-          <a:prstGeom prst="rect">
-            <a:avLst/>
-          </a:prstGeom>
-          <a:noFill/>
-        </p:spPr>
-        <p:txBody>
-          <a:bodyPr wrap="none" lIns="0" rIns="0">
-            <a:noAutofit/>
-          </a:bodyPr>
-          <a:lstStyle/>
-          <a:p>
-            <a:pPr algn="l"/>
+            <a:off x="11186160" y="6035040"/>
+            <a:ext cx="548640" cy="365760"/>
+          </a:xfrm>
+          <a:prstGeom prst="rect">
+            <a:avLst/>
+          </a:prstGeom>
+          <a:noFill/>
+        </p:spPr>
+        <p:txBody>
+          <a:bodyPr wrap="none" lIns="0" rIns="0">
+            <a:noAutofit/>
+          </a:bodyPr>
+          <a:lstStyle/>
+          <a:p>
+            <a:pPr algn="r"/>
             <a:fld id="{4B0E1F8A-6C1D-4E2A-9F3B-7A5C8D2E1F60}" type="slidenum">
               <a:rPr sz="1600" b="0" i="0">
                 <a:solidFill>
@@ -28985,21 +28985,21 @@
         </p:nvSpPr>
         <p:spPr>
           <a:xfrm>
-            <a:off x="10363200" y="6035040"/>
-            <a:ext cx="1371600" cy="365760"/>
-          </a:xfrm>
-          <a:prstGeom prst="rect">
-            <a:avLst/>
-          </a:prstGeom>
-          <a:noFill/>
-        </p:spPr>
-        <p:txBody>
-          <a:bodyPr wrap="none" lIns="0" rIns="0">
-            <a:noAutofit/>
-          </a:bodyPr>
-          <a:lstStyle/>
-          <a:p>
-            <a:pPr algn="l"/>
+            <a:off x="11186160" y="6035040"/>
+            <a:ext cx="548640" cy="365760"/>
+          </a:xfrm>
+          <a:prstGeom prst="rect">
+            <a:avLst/>
+          </a:prstGeom>
+          <a:noFill/>
+        </p:spPr>
+        <p:txBody>
+          <a:bodyPr wrap="none" lIns="0" rIns="0">
+            <a:noAutofit/>
+          </a:bodyPr>
+          <a:lstStyle/>
+          <a:p>
+            <a:pPr algn="r"/>
             <a:fld id="{4B0E1F8A-6C1D-4E2A-9F3B-7A5C8D2E1F60}" type="slidenum">
               <a:rPr sz="1600" b="0" i="0">
                 <a:solidFill>
@@ -29127,21 +29127,21 @@
         </p:nvSpPr>
         <p:spPr>
           <a:xfrm>
-            <a:off x="10363200" y="6035040"/>
-            <a:ext cx="1371600" cy="365760"/>
-          </a:xfrm>
-          <a:prstGeom prst="rect">
-            <a:avLst/>
-          </a:prstGeom>
-          <a:noFill/>
-        </p:spPr>
-        <p:txBody>
-          <a:bodyPr wrap="none" lIns="0" rIns="0">
-            <a:noAutofit/>
-          </a:bodyPr>
-          <a:lstStyle/>
-          <a:p>
-            <a:pPr algn="l"/>
+            <a:off x="11186160" y="6035040"/>
+            <a:ext cx="548640" cy="365760"/>
+          </a:xfrm>
+          <a:prstGeom prst="rect">
+            <a:avLst/>
+          </a:prstGeom>
+          <a:noFill/>
+        </p:spPr>
+        <p:txBody>
+          <a:bodyPr wrap="none" lIns="0" rIns="0">
+            <a:noAutofit/>
+          </a:bodyPr>
+          <a:lstStyle/>
+          <a:p>
+            <a:pPr algn="r"/>
             <a:fld id="{4B0E1F8A-6C1D-4E2A-9F3B-7A5C8D2E1F60}" type="slidenum">
               <a:rPr sz="1600" b="0" i="0">
                 <a:solidFill>
@@ -29785,21 +29785,21 @@
         </p:nvSpPr>
         <p:spPr>
           <a:xfrm>
-            <a:off x="10363200" y="6035040"/>
-            <a:ext cx="1371600" cy="365760"/>
-          </a:xfrm>
-          <a:prstGeom prst="rect">
-            <a:avLst/>
-          </a:prstGeom>
-          <a:noFill/>
-        </p:spPr>
-        <p:txBody>
-          <a:bodyPr wrap="none" lIns="0" rIns="0">
-            <a:noAutofit/>
-          </a:bodyPr>
-          <a:lstStyle/>
-          <a:p>
-            <a:pPr algn="l"/>
+            <a:off x="11186160" y="6035040"/>
+            <a:ext cx="548640" cy="365760"/>
+          </a:xfrm>
+          <a:prstGeom prst="rect">
+            <a:avLst/>
+          </a:prstGeom>
+          <a:noFill/>
+        </p:spPr>
+        <p:txBody>
+          <a:bodyPr wrap="none" lIns="0" rIns="0">
+            <a:noAutofit/>
+          </a:bodyPr>
+          <a:lstStyle/>
+          <a:p>
+            <a:pPr algn="r"/>
             <a:fld id="{4B0E1F8A-6C1D-4E2A-9F3B-7A5C8D2E1F60}" type="slidenum">
               <a:rPr sz="1600" b="0" i="0">
                 <a:solidFill>
@@ -29962,21 +29962,21 @@
         </p:nvSpPr>
         <p:spPr>
           <a:xfrm>
-            <a:off x="10363200" y="6035040"/>
-            <a:ext cx="1371600" cy="365760"/>
-          </a:xfrm>
-          <a:prstGeom prst="rect">
-            <a:avLst/>
-          </a:prstGeom>
-          <a:noFill/>
-        </p:spPr>
-        <p:txBody>
-          <a:bodyPr wrap="none" lIns="0" rIns="0">
-            <a:noAutofit/>
-          </a:bodyPr>
-          <a:lstStyle/>
-          <a:p>
-            <a:pPr algn="l"/>
+            <a:off x="11186160" y="6035040"/>
+            <a:ext cx="548640" cy="365760"/>
+          </a:xfrm>
+          <a:prstGeom prst="rect">
+            <a:avLst/>
+          </a:prstGeom>
+          <a:noFill/>
+        </p:spPr>
+        <p:txBody>
+          <a:bodyPr wrap="none" lIns="0" rIns="0">
+            <a:noAutofit/>
+          </a:bodyPr>
+          <a:lstStyle/>
+          <a:p>
+            <a:pPr algn="r"/>
             <a:fld id="{4B0E1F8A-6C1D-4E2A-9F3B-7A5C8D2E1F60}" type="slidenum">
               <a:rPr sz="1600" b="0" i="0">
                 <a:solidFill>
@@ -30041,7 +30041,7 @@
             <a:r>
               <a:rPr sz="4200" b="1" i="0">
                 <a:solidFill>
-                  <a:srgbClr val="8FC1F0"/>
+                  <a:srgbClr val="F0A202"/>
                 </a:solidFill>
                 <a:latin typeface="Arial"/>
               </a:rPr>
@@ -30454,21 +30454,21 @@
         </p:nvSpPr>
         <p:spPr>
           <a:xfrm>
-            <a:off x="10363200" y="6035040"/>
-            <a:ext cx="1371600" cy="365760"/>
-          </a:xfrm>
-          <a:prstGeom prst="rect">
-            <a:avLst/>
-          </a:prstGeom>
-          <a:noFill/>
-        </p:spPr>
-        <p:txBody>
-          <a:bodyPr wrap="none" lIns="0" rIns="0">
-            <a:noAutofit/>
-          </a:bodyPr>
-          <a:lstStyle/>
-          <a:p>
-            <a:pPr algn="l"/>
+            <a:off x="11186160" y="6035040"/>
+            <a:ext cx="548640" cy="365760"/>
+          </a:xfrm>
+          <a:prstGeom prst="rect">
+            <a:avLst/>
+          </a:prstGeom>
+          <a:noFill/>
+        </p:spPr>
+        <p:txBody>
+          <a:bodyPr wrap="none" lIns="0" rIns="0">
+            <a:noAutofit/>
+          </a:bodyPr>
+          <a:lstStyle/>
+          <a:p>
+            <a:pPr algn="r"/>
             <a:fld id="{4B0E1F8A-6C1D-4E2A-9F3B-7A5C8D2E1F60}" type="slidenum">
               <a:rPr sz="1600" b="0" i="0">
                 <a:solidFill>
@@ -30631,21 +30631,21 @@
         </p:nvSpPr>
         <p:spPr>
           <a:xfrm>
-            <a:off x="10363200" y="6035040"/>
-            <a:ext cx="1371600" cy="365760"/>
-          </a:xfrm>
-          <a:prstGeom prst="rect">
-            <a:avLst/>
-          </a:prstGeom>
-          <a:noFill/>
-        </p:spPr>
-        <p:txBody>
-          <a:bodyPr wrap="none" lIns="0" rIns="0">
-            <a:noAutofit/>
-          </a:bodyPr>
-          <a:lstStyle/>
-          <a:p>
-            <a:pPr algn="l"/>
+            <a:off x="11186160" y="6035040"/>
+            <a:ext cx="548640" cy="365760"/>
+          </a:xfrm>
+          <a:prstGeom prst="rect">
+            <a:avLst/>
+          </a:prstGeom>
+          <a:noFill/>
+        </p:spPr>
+        <p:txBody>
+          <a:bodyPr wrap="none" lIns="0" rIns="0">
+            <a:noAutofit/>
+          </a:bodyPr>
+          <a:lstStyle/>
+          <a:p>
+            <a:pPr algn="r"/>
             <a:fld id="{4B0E1F8A-6C1D-4E2A-9F3B-7A5C8D2E1F60}" type="slidenum">
               <a:rPr sz="1600" b="0" i="0">
                 <a:solidFill>
@@ -31254,21 +31254,21 @@
         </p:nvSpPr>
         <p:spPr>
           <a:xfrm>
-            <a:off x="10363200" y="6035040"/>
-            <a:ext cx="1371600" cy="365760"/>
-          </a:xfrm>
-          <a:prstGeom prst="rect">
-            <a:avLst/>
-          </a:prstGeom>
-          <a:noFill/>
-        </p:spPr>
-        <p:txBody>
-          <a:bodyPr wrap="none" lIns="0" rIns="0">
-            <a:noAutofit/>
-          </a:bodyPr>
-          <a:lstStyle/>
-          <a:p>
-            <a:pPr algn="l"/>
+            <a:off x="11186160" y="6035040"/>
+            <a:ext cx="548640" cy="365760"/>
+          </a:xfrm>
+          <a:prstGeom prst="rect">
+            <a:avLst/>
+          </a:prstGeom>
+          <a:noFill/>
+        </p:spPr>
+        <p:txBody>
+          <a:bodyPr wrap="none" lIns="0" rIns="0">
+            <a:noAutofit/>
+          </a:bodyPr>
+          <a:lstStyle/>
+          <a:p>
+            <a:pPr algn="r"/>
             <a:fld id="{4B0E1F8A-6C1D-4E2A-9F3B-7A5C8D2E1F60}" type="slidenum">
               <a:rPr sz="1600" b="0" i="0">
                 <a:solidFill>
@@ -31333,7 +31333,7 @@
             <a:r>
               <a:rPr sz="4200" b="1" i="0">
                 <a:solidFill>
-                  <a:srgbClr val="E7EDF3"/>
+                  <a:srgbClr val="F0A202"/>
                 </a:solidFill>
                 <a:latin typeface="Arial"/>
               </a:rPr>
@@ -31492,21 +31492,21 @@
         </p:nvSpPr>
         <p:spPr>
           <a:xfrm>
-            <a:off x="10363200" y="6035040"/>
-            <a:ext cx="1371600" cy="365760"/>
-          </a:xfrm>
-          <a:prstGeom prst="rect">
-            <a:avLst/>
-          </a:prstGeom>
-          <a:noFill/>
-        </p:spPr>
-        <p:txBody>
-          <a:bodyPr wrap="none" lIns="0" rIns="0">
-            <a:noAutofit/>
-          </a:bodyPr>
-          <a:lstStyle/>
-          <a:p>
-            <a:pPr algn="l"/>
+            <a:off x="11186160" y="6035040"/>
+            <a:ext cx="548640" cy="365760"/>
+          </a:xfrm>
+          <a:prstGeom prst="rect">
+            <a:avLst/>
+          </a:prstGeom>
+          <a:noFill/>
+        </p:spPr>
+        <p:txBody>
+          <a:bodyPr wrap="none" lIns="0" rIns="0">
+            <a:noAutofit/>
+          </a:bodyPr>
+          <a:lstStyle/>
+          <a:p>
+            <a:pPr algn="r"/>
             <a:fld id="{4B0E1F8A-6C1D-4E2A-9F3B-7A5C8D2E1F60}" type="slidenum">
               <a:rPr sz="1600" b="0" i="0">
                 <a:solidFill>
@@ -31650,7 +31650,7 @@
             <a:r>
               <a:rPr sz="4200" b="1" i="0">
                 <a:solidFill>
-                  <a:srgbClr val="E7EDF3"/>
+                  <a:srgbClr val="F0A202"/>
                 </a:solidFill>
                 <a:latin typeface="Arial"/>
               </a:rPr>
@@ -31669,21 +31669,21 @@
         </p:nvSpPr>
         <p:spPr>
           <a:xfrm>
-            <a:off x="10363200" y="6035040"/>
-            <a:ext cx="1371600" cy="365760"/>
-          </a:xfrm>
-          <a:prstGeom prst="rect">
-            <a:avLst/>
-          </a:prstGeom>
-          <a:noFill/>
-        </p:spPr>
-        <p:txBody>
-          <a:bodyPr wrap="none" lIns="0" rIns="0">
-            <a:noAutofit/>
-          </a:bodyPr>
-          <a:lstStyle/>
-          <a:p>
-            <a:pPr algn="l"/>
+            <a:off x="11186160" y="6035040"/>
+            <a:ext cx="548640" cy="365760"/>
+          </a:xfrm>
+          <a:prstGeom prst="rect">
+            <a:avLst/>
+          </a:prstGeom>
+          <a:noFill/>
+        </p:spPr>
+        <p:txBody>
+          <a:bodyPr wrap="none" lIns="0" rIns="0">
+            <a:noAutofit/>
+          </a:bodyPr>
+          <a:lstStyle/>
+          <a:p>
+            <a:pPr algn="r"/>
             <a:fld id="{4B0E1F8A-6C1D-4E2A-9F3B-7A5C8D2E1F60}" type="slidenum">
               <a:rPr sz="1600" b="0" i="0">
                 <a:solidFill>
@@ -31837,21 +31837,21 @@
         </p:nvSpPr>
         <p:spPr>
           <a:xfrm>
-            <a:off x="10363200" y="6035040"/>
-            <a:ext cx="1371600" cy="365760"/>
-          </a:xfrm>
-          <a:prstGeom prst="rect">
-            <a:avLst/>
-          </a:prstGeom>
-          <a:noFill/>
-        </p:spPr>
-        <p:txBody>
-          <a:bodyPr wrap="none" lIns="0" rIns="0">
-            <a:noAutofit/>
-          </a:bodyPr>
-          <a:lstStyle/>
-          <a:p>
-            <a:pPr algn="l"/>
+            <a:off x="11186160" y="6035040"/>
+            <a:ext cx="548640" cy="365760"/>
+          </a:xfrm>
+          <a:prstGeom prst="rect">
+            <a:avLst/>
+          </a:prstGeom>
+          <a:noFill/>
+        </p:spPr>
+        <p:txBody>
+          <a:bodyPr wrap="none" lIns="0" rIns="0">
+            <a:noAutofit/>
+          </a:bodyPr>
+          <a:lstStyle/>
+          <a:p>
+            <a:pPr algn="r"/>
             <a:fld id="{4B0E1F8A-6C1D-4E2A-9F3B-7A5C8D2E1F60}" type="slidenum">
               <a:rPr sz="1600" b="0" i="0">
                 <a:solidFill>
@@ -31916,7 +31916,7 @@
             <a:r>
               <a:rPr sz="4200" b="1" i="0">
                 <a:solidFill>
-                  <a:srgbClr val="E7EDF3"/>
+                  <a:srgbClr val="F0A202"/>
                 </a:solidFill>
                 <a:latin typeface="Arial"/>
               </a:rPr>
@@ -32040,21 +32040,21 @@
         </p:nvSpPr>
         <p:spPr>
           <a:xfrm>
-            <a:off x="10363200" y="6035040"/>
-            <a:ext cx="1371600" cy="365760"/>
-          </a:xfrm>
-          <a:prstGeom prst="rect">
-            <a:avLst/>
-          </a:prstGeom>
-          <a:noFill/>
-        </p:spPr>
-        <p:txBody>
-          <a:bodyPr wrap="none" lIns="0" rIns="0">
-            <a:noAutofit/>
-          </a:bodyPr>
-          <a:lstStyle/>
-          <a:p>
-            <a:pPr algn="l"/>
+            <a:off x="11186160" y="6035040"/>
+            <a:ext cx="548640" cy="365760"/>
+          </a:xfrm>
+          <a:prstGeom prst="rect">
+            <a:avLst/>
+          </a:prstGeom>
+          <a:noFill/>
+        </p:spPr>
+        <p:txBody>
+          <a:bodyPr wrap="none" lIns="0" rIns="0">
+            <a:noAutofit/>
+          </a:bodyPr>
+          <a:lstStyle/>
+          <a:p>
+            <a:pPr algn="r"/>
             <a:fld id="{4B0E1F8A-6C1D-4E2A-9F3B-7A5C8D2E1F60}" type="slidenum">
               <a:rPr sz="1600" b="0" i="0">
                 <a:solidFill>
@@ -32523,21 +32523,21 @@
         </p:nvSpPr>
         <p:spPr>
           <a:xfrm>
-            <a:off x="10363200" y="6035040"/>
-            <a:ext cx="1371600" cy="365760"/>
-          </a:xfrm>
-          <a:prstGeom prst="rect">
-            <a:avLst/>
-          </a:prstGeom>
-          <a:noFill/>
-        </p:spPr>
-        <p:txBody>
-          <a:bodyPr wrap="none" lIns="0" rIns="0">
-            <a:noAutofit/>
-          </a:bodyPr>
-          <a:lstStyle/>
-          <a:p>
-            <a:pPr algn="l"/>
+            <a:off x="11186160" y="6035040"/>
+            <a:ext cx="548640" cy="365760"/>
+          </a:xfrm>
+          <a:prstGeom prst="rect">
+            <a:avLst/>
+          </a:prstGeom>
+          <a:noFill/>
+        </p:spPr>
+        <p:txBody>
+          <a:bodyPr wrap="none" lIns="0" rIns="0">
+            <a:noAutofit/>
+          </a:bodyPr>
+          <a:lstStyle/>
+          <a:p>
+            <a:pPr algn="r"/>
             <a:fld id="{4B0E1F8A-6C1D-4E2A-9F3B-7A5C8D2E1F60}" type="slidenum">
               <a:rPr sz="1600" b="0" i="0">
                 <a:solidFill>
@@ -33418,21 +33418,21 @@
         </p:nvSpPr>
         <p:spPr>
           <a:xfrm>
-            <a:off x="10363200" y="6035040"/>
-            <a:ext cx="1371600" cy="365760"/>
-          </a:xfrm>
-          <a:prstGeom prst="rect">
-            <a:avLst/>
-          </a:prstGeom>
-          <a:noFill/>
-        </p:spPr>
-        <p:txBody>
-          <a:bodyPr wrap="none" lIns="0" rIns="0">
-            <a:noAutofit/>
-          </a:bodyPr>
-          <a:lstStyle/>
-          <a:p>
-            <a:pPr algn="l"/>
+            <a:off x="11186160" y="6035040"/>
+            <a:ext cx="548640" cy="365760"/>
+          </a:xfrm>
+          <a:prstGeom prst="rect">
+            <a:avLst/>
+          </a:prstGeom>
+          <a:noFill/>
+        </p:spPr>
+        <p:txBody>
+          <a:bodyPr wrap="none" lIns="0" rIns="0">
+            <a:noAutofit/>
+          </a:bodyPr>
+          <a:lstStyle/>
+          <a:p>
+            <a:pPr algn="r"/>
             <a:fld id="{4B0E1F8A-6C1D-4E2A-9F3B-7A5C8D2E1F60}" type="slidenum">
               <a:rPr sz="1600" b="0" i="0">
                 <a:solidFill>
@@ -33497,7 +33497,7 @@
             <a:r>
               <a:rPr sz="4200" b="1" i="0">
                 <a:solidFill>
-                  <a:srgbClr val="8FC1F0"/>
+                  <a:srgbClr val="F0A202"/>
                 </a:solidFill>
                 <a:latin typeface="Arial"/>
               </a:rPr>
@@ -33884,21 +33884,21 @@
         </p:nvSpPr>
         <p:spPr>
           <a:xfrm>
-            <a:off x="10363200" y="6035040"/>
-            <a:ext cx="1371600" cy="365760"/>
-          </a:xfrm>
-          <a:prstGeom prst="rect">
-            <a:avLst/>
-          </a:prstGeom>
-          <a:noFill/>
-        </p:spPr>
-        <p:txBody>
-          <a:bodyPr wrap="none" lIns="0" rIns="0">
-            <a:noAutofit/>
-          </a:bodyPr>
-          <a:lstStyle/>
-          <a:p>
-            <a:pPr algn="l"/>
+            <a:off x="11186160" y="6035040"/>
+            <a:ext cx="548640" cy="365760"/>
+          </a:xfrm>
+          <a:prstGeom prst="rect">
+            <a:avLst/>
+          </a:prstGeom>
+          <a:noFill/>
+        </p:spPr>
+        <p:txBody>
+          <a:bodyPr wrap="none" lIns="0" rIns="0">
+            <a:noAutofit/>
+          </a:bodyPr>
+          <a:lstStyle/>
+          <a:p>
+            <a:pPr algn="r"/>
             <a:fld id="{4B0E1F8A-6C1D-4E2A-9F3B-7A5C8D2E1F60}" type="slidenum">
               <a:rPr sz="1600" b="0" i="0">
                 <a:solidFill>
@@ -34042,7 +34042,7 @@
             <a:r>
               <a:rPr sz="4200" b="1" i="0">
                 <a:solidFill>
-                  <a:srgbClr val="E7EDF3"/>
+                  <a:srgbClr val="F0A202"/>
                 </a:solidFill>
                 <a:latin typeface="Arial"/>
               </a:rPr>
@@ -34061,21 +34061,21 @@
         </p:nvSpPr>
         <p:spPr>
           <a:xfrm>
-            <a:off x="10363200" y="6035040"/>
-            <a:ext cx="1371600" cy="365760"/>
-          </a:xfrm>
-          <a:prstGeom prst="rect">
-            <a:avLst/>
-          </a:prstGeom>
-          <a:noFill/>
-        </p:spPr>
-        <p:txBody>
-          <a:bodyPr wrap="none" lIns="0" rIns="0">
-            <a:noAutofit/>
-          </a:bodyPr>
-          <a:lstStyle/>
-          <a:p>
-            <a:pPr algn="l"/>
+            <a:off x="11186160" y="6035040"/>
+            <a:ext cx="548640" cy="365760"/>
+          </a:xfrm>
+          <a:prstGeom prst="rect">
+            <a:avLst/>
+          </a:prstGeom>
+          <a:noFill/>
+        </p:spPr>
+        <p:txBody>
+          <a:bodyPr wrap="none" lIns="0" rIns="0">
+            <a:noAutofit/>
+          </a:bodyPr>
+          <a:lstStyle/>
+          <a:p>
+            <a:pPr algn="r"/>
             <a:fld id="{4B0E1F8A-6C1D-4E2A-9F3B-7A5C8D2E1F60}" type="slidenum">
               <a:rPr sz="1600" b="0" i="0">
                 <a:solidFill>
@@ -34229,21 +34229,21 @@
         </p:nvSpPr>
         <p:spPr>
           <a:xfrm>
-            <a:off x="10363200" y="6035040"/>
-            <a:ext cx="1371600" cy="365760"/>
-          </a:xfrm>
-          <a:prstGeom prst="rect">
-            <a:avLst/>
-          </a:prstGeom>
-          <a:noFill/>
-        </p:spPr>
-        <p:txBody>
-          <a:bodyPr wrap="none" lIns="0" rIns="0">
-            <a:noAutofit/>
-          </a:bodyPr>
-          <a:lstStyle/>
-          <a:p>
-            <a:pPr algn="l"/>
+            <a:off x="11186160" y="6035040"/>
+            <a:ext cx="548640" cy="365760"/>
+          </a:xfrm>
+          <a:prstGeom prst="rect">
+            <a:avLst/>
+          </a:prstGeom>
+          <a:noFill/>
+        </p:spPr>
+        <p:txBody>
+          <a:bodyPr wrap="none" lIns="0" rIns="0">
+            <a:noAutofit/>
+          </a:bodyPr>
+          <a:lstStyle/>
+          <a:p>
+            <a:pPr algn="r"/>
             <a:fld id="{4B0E1F8A-6C1D-4E2A-9F3B-7A5C8D2E1F60}" type="slidenum">
               <a:rPr sz="1600" b="0" i="0">
                 <a:solidFill>
@@ -34712,21 +34712,21 @@
         </p:nvSpPr>
         <p:spPr>
           <a:xfrm>
-            <a:off x="10363200" y="6035040"/>
-            <a:ext cx="1371600" cy="365760"/>
-          </a:xfrm>
-          <a:prstGeom prst="rect">
-            <a:avLst/>
-          </a:prstGeom>
-          <a:noFill/>
-        </p:spPr>
-        <p:txBody>
-          <a:bodyPr wrap="none" lIns="0" rIns="0">
-            <a:noAutofit/>
-          </a:bodyPr>
-          <a:lstStyle/>
-          <a:p>
-            <a:pPr algn="l"/>
+            <a:off x="11186160" y="6035040"/>
+            <a:ext cx="548640" cy="365760"/>
+          </a:xfrm>
+          <a:prstGeom prst="rect">
+            <a:avLst/>
+          </a:prstGeom>
+          <a:noFill/>
+        </p:spPr>
+        <p:txBody>
+          <a:bodyPr wrap="none" lIns="0" rIns="0">
+            <a:noAutofit/>
+          </a:bodyPr>
+          <a:lstStyle/>
+          <a:p>
+            <a:pPr algn="r"/>
             <a:fld id="{4B0E1F8A-6C1D-4E2A-9F3B-7A5C8D2E1F60}" type="slidenum">
               <a:rPr sz="1600" b="0" i="0">
                 <a:solidFill>
@@ -34791,7 +34791,7 @@
             <a:r>
               <a:rPr sz="4200" b="1" i="0">
                 <a:solidFill>
-                  <a:srgbClr val="8FC1F0"/>
+                  <a:srgbClr val="F0A202"/>
                 </a:solidFill>
                 <a:latin typeface="Arial"/>
               </a:rPr>
@@ -35108,21 +35108,21 @@
         </p:nvSpPr>
         <p:spPr>
           <a:xfrm>
-            <a:off x="10363200" y="6035040"/>
-            <a:ext cx="1371600" cy="365760"/>
-          </a:xfrm>
-          <a:prstGeom prst="rect">
-            <a:avLst/>
-          </a:prstGeom>
-          <a:noFill/>
-        </p:spPr>
-        <p:txBody>
-          <a:bodyPr wrap="none" lIns="0" rIns="0">
-            <a:noAutofit/>
-          </a:bodyPr>
-          <a:lstStyle/>
-          <a:p>
-            <a:pPr algn="l"/>
+            <a:off x="11186160" y="6035040"/>
+            <a:ext cx="548640" cy="365760"/>
+          </a:xfrm>
+          <a:prstGeom prst="rect">
+            <a:avLst/>
+          </a:prstGeom>
+          <a:noFill/>
+        </p:spPr>
+        <p:txBody>
+          <a:bodyPr wrap="none" lIns="0" rIns="0">
+            <a:noAutofit/>
+          </a:bodyPr>
+          <a:lstStyle/>
+          <a:p>
+            <a:pPr algn="r"/>
             <a:fld id="{4B0E1F8A-6C1D-4E2A-9F3B-7A5C8D2E1F60}" type="slidenum">
               <a:rPr sz="1600" b="0" i="0">
                 <a:solidFill>
@@ -35187,7 +35187,7 @@
             <a:r>
               <a:rPr sz="4200" b="1" i="0">
                 <a:solidFill>
-                  <a:srgbClr val="E7EDF3"/>
+                  <a:srgbClr val="F0A202"/>
                 </a:solidFill>
                 <a:latin typeface="Arial"/>
               </a:rPr>
@@ -35311,21 +35311,21 @@
         </p:nvSpPr>
         <p:spPr>
           <a:xfrm>
-            <a:off x="10363200" y="6035040"/>
-            <a:ext cx="1371600" cy="365760"/>
-          </a:xfrm>
-          <a:prstGeom prst="rect">
-            <a:avLst/>
-          </a:prstGeom>
-          <a:noFill/>
-        </p:spPr>
-        <p:txBody>
-          <a:bodyPr wrap="none" lIns="0" rIns="0">
-            <a:noAutofit/>
-          </a:bodyPr>
-          <a:lstStyle/>
-          <a:p>
-            <a:pPr algn="l"/>
+            <a:off x="11186160" y="6035040"/>
+            <a:ext cx="548640" cy="365760"/>
+          </a:xfrm>
+          <a:prstGeom prst="rect">
+            <a:avLst/>
+          </a:prstGeom>
+          <a:noFill/>
+        </p:spPr>
+        <p:txBody>
+          <a:bodyPr wrap="none" lIns="0" rIns="0">
+            <a:noAutofit/>
+          </a:bodyPr>
+          <a:lstStyle/>
+          <a:p>
+            <a:pPr algn="r"/>
             <a:fld id="{4B0E1F8A-6C1D-4E2A-9F3B-7A5C8D2E1F60}" type="slidenum">
               <a:rPr sz="1600" b="0" i="0">
                 <a:solidFill>
@@ -35469,7 +35469,7 @@
             <a:r>
               <a:rPr sz="4200" b="1" i="0">
                 <a:solidFill>
-                  <a:srgbClr val="E7EDF3"/>
+                  <a:srgbClr val="F0A202"/>
                 </a:solidFill>
                 <a:latin typeface="Arial"/>
               </a:rPr>
@@ -35488,21 +35488,21 @@
         </p:nvSpPr>
         <p:spPr>
           <a:xfrm>
-            <a:off x="10363200" y="6035040"/>
-            <a:ext cx="1371600" cy="365760"/>
-          </a:xfrm>
-          <a:prstGeom prst="rect">
-            <a:avLst/>
-          </a:prstGeom>
-          <a:noFill/>
-        </p:spPr>
-        <p:txBody>
-          <a:bodyPr wrap="none" lIns="0" rIns="0">
-            <a:noAutofit/>
-          </a:bodyPr>
-          <a:lstStyle/>
-          <a:p>
-            <a:pPr algn="l"/>
+            <a:off x="11186160" y="6035040"/>
+            <a:ext cx="548640" cy="365760"/>
+          </a:xfrm>
+          <a:prstGeom prst="rect">
+            <a:avLst/>
+          </a:prstGeom>
+          <a:noFill/>
+        </p:spPr>
+        <p:txBody>
+          <a:bodyPr wrap="none" lIns="0" rIns="0">
+            <a:noAutofit/>
+          </a:bodyPr>
+          <a:lstStyle/>
+          <a:p>
+            <a:pPr algn="r"/>
             <a:fld id="{4B0E1F8A-6C1D-4E2A-9F3B-7A5C8D2E1F60}" type="slidenum">
               <a:rPr sz="1600" b="0" i="0">
                 <a:solidFill>
@@ -35567,7 +35567,7 @@
             <a:r>
               <a:rPr sz="4200" b="1" i="0">
                 <a:solidFill>
-                  <a:srgbClr val="E7EDF3"/>
+                  <a:srgbClr val="F0A202"/>
                 </a:solidFill>
                 <a:latin typeface="Arial"/>
               </a:rPr>
@@ -35691,21 +35691,21 @@
         </p:nvSpPr>
         <p:spPr>
           <a:xfrm>
-            <a:off x="10363200" y="6035040"/>
-            <a:ext cx="1371600" cy="365760"/>
-          </a:xfrm>
-          <a:prstGeom prst="rect">
-            <a:avLst/>
-          </a:prstGeom>
-          <a:noFill/>
-        </p:spPr>
-        <p:txBody>
-          <a:bodyPr wrap="none" lIns="0" rIns="0">
-            <a:noAutofit/>
-          </a:bodyPr>
-          <a:lstStyle/>
-          <a:p>
-            <a:pPr algn="l"/>
+            <a:off x="11186160" y="6035040"/>
+            <a:ext cx="548640" cy="365760"/>
+          </a:xfrm>
+          <a:prstGeom prst="rect">
+            <a:avLst/>
+          </a:prstGeom>
+          <a:noFill/>
+        </p:spPr>
+        <p:txBody>
+          <a:bodyPr wrap="none" lIns="0" rIns="0">
+            <a:noAutofit/>
+          </a:bodyPr>
+          <a:lstStyle/>
+          <a:p>
+            <a:pPr algn="r"/>
             <a:fld id="{4B0E1F8A-6C1D-4E2A-9F3B-7A5C8D2E1F60}" type="slidenum">
               <a:rPr sz="1600" b="0" i="0">
                 <a:solidFill>
@@ -35770,7 +35770,7 @@
             <a:r>
               <a:rPr sz="4200" b="1" i="0">
                 <a:solidFill>
-                  <a:srgbClr val="E7EDF3"/>
+                  <a:srgbClr val="F0A202"/>
                 </a:solidFill>
                 <a:latin typeface="Arial"/>
               </a:rPr>
@@ -36104,21 +36104,21 @@
         </p:nvSpPr>
         <p:spPr>
           <a:xfrm>
-            <a:off x="10363200" y="6035040"/>
-            <a:ext cx="1371600" cy="365760"/>
-          </a:xfrm>
-          <a:prstGeom prst="rect">
-            <a:avLst/>
-          </a:prstGeom>
-          <a:noFill/>
-        </p:spPr>
-        <p:txBody>
-          <a:bodyPr wrap="none" lIns="0" rIns="0">
-            <a:noAutofit/>
-          </a:bodyPr>
-          <a:lstStyle/>
-          <a:p>
-            <a:pPr algn="l"/>
+            <a:off x="11186160" y="6035040"/>
+            <a:ext cx="548640" cy="365760"/>
+          </a:xfrm>
+          <a:prstGeom prst="rect">
+            <a:avLst/>
+          </a:prstGeom>
+          <a:noFill/>
+        </p:spPr>
+        <p:txBody>
+          <a:bodyPr wrap="none" lIns="0" rIns="0">
+            <a:noAutofit/>
+          </a:bodyPr>
+          <a:lstStyle/>
+          <a:p>
+            <a:pPr algn="r"/>
             <a:fld id="{4B0E1F8A-6C1D-4E2A-9F3B-7A5C8D2E1F60}" type="slidenum">
               <a:rPr sz="1600" b="0" i="0">
                 <a:solidFill>
@@ -36412,21 +36412,21 @@
         </p:nvSpPr>
         <p:spPr>
           <a:xfrm>
-            <a:off x="10363200" y="6035040"/>
-            <a:ext cx="1371600" cy="365760"/>
-          </a:xfrm>
-          <a:prstGeom prst="rect">
-            <a:avLst/>
-          </a:prstGeom>
-          <a:noFill/>
-        </p:spPr>
-        <p:txBody>
-          <a:bodyPr wrap="none" lIns="0" rIns="0">
-            <a:noAutofit/>
-          </a:bodyPr>
-          <a:lstStyle/>
-          <a:p>
-            <a:pPr algn="l"/>
+            <a:off x="11186160" y="6035040"/>
+            <a:ext cx="548640" cy="365760"/>
+          </a:xfrm>
+          <a:prstGeom prst="rect">
+            <a:avLst/>
+          </a:prstGeom>
+          <a:noFill/>
+        </p:spPr>
+        <p:txBody>
+          <a:bodyPr wrap="none" lIns="0" rIns="0">
+            <a:noAutofit/>
+          </a:bodyPr>
+          <a:lstStyle/>
+          <a:p>
+            <a:pPr algn="r"/>
             <a:fld id="{4B0E1F8A-6C1D-4E2A-9F3B-7A5C8D2E1F60}" type="slidenum">
               <a:rPr sz="1600" b="0" i="0">
                 <a:solidFill>
@@ -36491,7 +36491,7 @@
             <a:r>
               <a:rPr sz="4200" b="1" i="0">
                 <a:solidFill>
-                  <a:srgbClr val="8FC1F0"/>
+                  <a:srgbClr val="F0A202"/>
                 </a:solidFill>
                 <a:latin typeface="Arial"/>
               </a:rPr>
@@ -36878,21 +36878,21 @@
         </p:nvSpPr>
         <p:spPr>
           <a:xfrm>
-            <a:off x="10363200" y="6035040"/>
-            <a:ext cx="1371600" cy="365760"/>
-          </a:xfrm>
-          <a:prstGeom prst="rect">
-            <a:avLst/>
-          </a:prstGeom>
-          <a:noFill/>
-        </p:spPr>
-        <p:txBody>
-          <a:bodyPr wrap="none" lIns="0" rIns="0">
-            <a:noAutofit/>
-          </a:bodyPr>
-          <a:lstStyle/>
-          <a:p>
-            <a:pPr algn="l"/>
+            <a:off x="11186160" y="6035040"/>
+            <a:ext cx="548640" cy="365760"/>
+          </a:xfrm>
+          <a:prstGeom prst="rect">
+            <a:avLst/>
+          </a:prstGeom>
+          <a:noFill/>
+        </p:spPr>
+        <p:txBody>
+          <a:bodyPr wrap="none" lIns="0" rIns="0">
+            <a:noAutofit/>
+          </a:bodyPr>
+          <a:lstStyle/>
+          <a:p>
+            <a:pPr algn="r"/>
             <a:fld id="{4B0E1F8A-6C1D-4E2A-9F3B-7A5C8D2E1F60}" type="slidenum">
               <a:rPr sz="1600" b="0" i="0">
                 <a:solidFill>
@@ -36957,7 +36957,7 @@
             <a:r>
               <a:rPr sz="4200" b="1" i="0">
                 <a:solidFill>
-                  <a:srgbClr val="E7EDF3"/>
+                  <a:srgbClr val="F0A202"/>
                 </a:solidFill>
                 <a:latin typeface="Arial"/>
               </a:rPr>
@@ -37116,21 +37116,21 @@
         </p:nvSpPr>
         <p:spPr>
           <a:xfrm>
-            <a:off x="10363200" y="6035040"/>
-            <a:ext cx="1371600" cy="365760"/>
-          </a:xfrm>
-          <a:prstGeom prst="rect">
-            <a:avLst/>
-          </a:prstGeom>
-          <a:noFill/>
-        </p:spPr>
-        <p:txBody>
-          <a:bodyPr wrap="none" lIns="0" rIns="0">
-            <a:noAutofit/>
-          </a:bodyPr>
-          <a:lstStyle/>
-          <a:p>
-            <a:pPr algn="l"/>
+            <a:off x="11186160" y="6035040"/>
+            <a:ext cx="548640" cy="365760"/>
+          </a:xfrm>
+          <a:prstGeom prst="rect">
+            <a:avLst/>
+          </a:prstGeom>
+          <a:noFill/>
+        </p:spPr>
+        <p:txBody>
+          <a:bodyPr wrap="none" lIns="0" rIns="0">
+            <a:noAutofit/>
+          </a:bodyPr>
+          <a:lstStyle/>
+          <a:p>
+            <a:pPr algn="r"/>
             <a:fld id="{4B0E1F8A-6C1D-4E2A-9F3B-7A5C8D2E1F60}" type="slidenum">
               <a:rPr sz="1600" b="0" i="0">
                 <a:solidFill>
@@ -37274,7 +37274,7 @@
             <a:r>
               <a:rPr sz="4200" b="1" i="0">
                 <a:solidFill>
-                  <a:srgbClr val="E7EDF3"/>
+                  <a:srgbClr val="F0A202"/>
                 </a:solidFill>
                 <a:latin typeface="Arial"/>
               </a:rPr>
@@ -37293,21 +37293,21 @@
         </p:nvSpPr>
         <p:spPr>
           <a:xfrm>
-            <a:off x="10363200" y="6035040"/>
-            <a:ext cx="1371600" cy="365760"/>
-          </a:xfrm>
-          <a:prstGeom prst="rect">
-            <a:avLst/>
-          </a:prstGeom>
-          <a:noFill/>
-        </p:spPr>
-        <p:txBody>
-          <a:bodyPr wrap="none" lIns="0" rIns="0">
-            <a:noAutofit/>
-          </a:bodyPr>
-          <a:lstStyle/>
-          <a:p>
-            <a:pPr algn="l"/>
+            <a:off x="11186160" y="6035040"/>
+            <a:ext cx="548640" cy="365760"/>
+          </a:xfrm>
+          <a:prstGeom prst="rect">
+            <a:avLst/>
+          </a:prstGeom>
+          <a:noFill/>
+        </p:spPr>
+        <p:txBody>
+          <a:bodyPr wrap="none" lIns="0" rIns="0">
+            <a:noAutofit/>
+          </a:bodyPr>
+          <a:lstStyle/>
+          <a:p>
+            <a:pPr algn="r"/>
             <a:fld id="{4B0E1F8A-6C1D-4E2A-9F3B-7A5C8D2E1F60}" type="slidenum">
               <a:rPr sz="1600" b="0" i="0">
                 <a:solidFill>
@@ -37372,7 +37372,7 @@
             <a:r>
               <a:rPr sz="4200" b="1" i="0">
                 <a:solidFill>
-                  <a:srgbClr val="8FC1F0"/>
+                  <a:srgbClr val="F0A202"/>
                 </a:solidFill>
                 <a:latin typeface="Arial"/>
               </a:rPr>
@@ -37829,21 +37829,21 @@
         </p:nvSpPr>
         <p:spPr>
           <a:xfrm>
-            <a:off x="10363200" y="6035040"/>
-            <a:ext cx="1371600" cy="365760"/>
-          </a:xfrm>
-          <a:prstGeom prst="rect">
-            <a:avLst/>
-          </a:prstGeom>
-          <a:noFill/>
-        </p:spPr>
-        <p:txBody>
-          <a:bodyPr wrap="none" lIns="0" rIns="0">
-            <a:noAutofit/>
-          </a:bodyPr>
-          <a:lstStyle/>
-          <a:p>
-            <a:pPr algn="l"/>
+            <a:off x="11186160" y="6035040"/>
+            <a:ext cx="548640" cy="365760"/>
+          </a:xfrm>
+          <a:prstGeom prst="rect">
+            <a:avLst/>
+          </a:prstGeom>
+          <a:noFill/>
+        </p:spPr>
+        <p:txBody>
+          <a:bodyPr wrap="none" lIns="0" rIns="0">
+            <a:noAutofit/>
+          </a:bodyPr>
+          <a:lstStyle/>
+          <a:p>
+            <a:pPr algn="r"/>
             <a:fld id="{4B0E1F8A-6C1D-4E2A-9F3B-7A5C8D2E1F60}" type="slidenum">
               <a:rPr sz="1600" b="0" i="0">
                 <a:solidFill>
@@ -38899,21 +38899,21 @@
         </p:nvSpPr>
         <p:spPr>
           <a:xfrm>
-            <a:off x="10363200" y="6035040"/>
-            <a:ext cx="1371600" cy="365760"/>
-          </a:xfrm>
-          <a:prstGeom prst="rect">
-            <a:avLst/>
-          </a:prstGeom>
-          <a:noFill/>
-        </p:spPr>
-        <p:txBody>
-          <a:bodyPr wrap="none" lIns="0" rIns="0">
-            <a:noAutofit/>
-          </a:bodyPr>
-          <a:lstStyle/>
-          <a:p>
-            <a:pPr algn="l"/>
+            <a:off x="11186160" y="6035040"/>
+            <a:ext cx="548640" cy="365760"/>
+          </a:xfrm>
+          <a:prstGeom prst="rect">
+            <a:avLst/>
+          </a:prstGeom>
+          <a:noFill/>
+        </p:spPr>
+        <p:txBody>
+          <a:bodyPr wrap="none" lIns="0" rIns="0">
+            <a:noAutofit/>
+          </a:bodyPr>
+          <a:lstStyle/>
+          <a:p>
+            <a:pPr algn="r"/>
             <a:fld id="{4B0E1F8A-6C1D-4E2A-9F3B-7A5C8D2E1F60}" type="slidenum">
               <a:rPr sz="1600" b="0" i="0">
                 <a:solidFill>
@@ -38978,7 +38978,7 @@
             <a:r>
               <a:rPr sz="4200" b="1" i="0">
                 <a:solidFill>
-                  <a:srgbClr val="E7EDF3"/>
+                  <a:srgbClr val="F0A202"/>
                 </a:solidFill>
                 <a:latin typeface="Arial"/>
               </a:rPr>
@@ -39172,21 +39172,21 @@
         </p:nvSpPr>
         <p:spPr>
           <a:xfrm>
-            <a:off x="10363200" y="6035040"/>
-            <a:ext cx="1371600" cy="365760"/>
-          </a:xfrm>
-          <a:prstGeom prst="rect">
-            <a:avLst/>
-          </a:prstGeom>
-          <a:noFill/>
-        </p:spPr>
-        <p:txBody>
-          <a:bodyPr wrap="none" lIns="0" rIns="0">
-            <a:noAutofit/>
-          </a:bodyPr>
-          <a:lstStyle/>
-          <a:p>
-            <a:pPr algn="l"/>
+            <a:off x="11186160" y="6035040"/>
+            <a:ext cx="548640" cy="365760"/>
+          </a:xfrm>
+          <a:prstGeom prst="rect">
+            <a:avLst/>
+          </a:prstGeom>
+          <a:noFill/>
+        </p:spPr>
+        <p:txBody>
+          <a:bodyPr wrap="none" lIns="0" rIns="0">
+            <a:noAutofit/>
+          </a:bodyPr>
+          <a:lstStyle/>
+          <a:p>
+            <a:pPr algn="r"/>
             <a:fld id="{4B0E1F8A-6C1D-4E2A-9F3B-7A5C8D2E1F60}" type="slidenum">
               <a:rPr sz="1600" b="0" i="0">
                 <a:solidFill>
@@ -39384,21 +39384,21 @@
         </p:nvSpPr>
         <p:spPr>
           <a:xfrm>
-            <a:off x="10363200" y="6035040"/>
-            <a:ext cx="1371600" cy="365760"/>
-          </a:xfrm>
-          <a:prstGeom prst="rect">
-            <a:avLst/>
-          </a:prstGeom>
-          <a:noFill/>
-        </p:spPr>
-        <p:txBody>
-          <a:bodyPr wrap="none" lIns="0" rIns="0">
-            <a:noAutofit/>
-          </a:bodyPr>
-          <a:lstStyle/>
-          <a:p>
-            <a:pPr algn="l"/>
+            <a:off x="11186160" y="6035040"/>
+            <a:ext cx="548640" cy="365760"/>
+          </a:xfrm>
+          <a:prstGeom prst="rect">
+            <a:avLst/>
+          </a:prstGeom>
+          <a:noFill/>
+        </p:spPr>
+        <p:txBody>
+          <a:bodyPr wrap="none" lIns="0" rIns="0">
+            <a:noAutofit/>
+          </a:bodyPr>
+          <a:lstStyle/>
+          <a:p>
+            <a:pPr algn="r"/>
             <a:fld id="{4B0E1F8A-6C1D-4E2A-9F3B-7A5C8D2E1F60}" type="slidenum">
               <a:rPr sz="1600" b="0" i="0">
                 <a:solidFill>
@@ -39542,7 +39542,7 @@
             <a:r>
               <a:rPr sz="4200" b="1" i="0">
                 <a:solidFill>
-                  <a:srgbClr val="E7EDF3"/>
+                  <a:srgbClr val="F0A202"/>
                 </a:solidFill>
                 <a:latin typeface="Arial"/>
               </a:rPr>
@@ -39561,21 +39561,21 @@
         </p:nvSpPr>
         <p:spPr>
           <a:xfrm>
-            <a:off x="10363200" y="6035040"/>
-            <a:ext cx="1371600" cy="365760"/>
-          </a:xfrm>
-          <a:prstGeom prst="rect">
-            <a:avLst/>
-          </a:prstGeom>
-          <a:noFill/>
-        </p:spPr>
-        <p:txBody>
-          <a:bodyPr wrap="none" lIns="0" rIns="0">
-            <a:noAutofit/>
-          </a:bodyPr>
-          <a:lstStyle/>
-          <a:p>
-            <a:pPr algn="l"/>
+            <a:off x="11186160" y="6035040"/>
+            <a:ext cx="548640" cy="365760"/>
+          </a:xfrm>
+          <a:prstGeom prst="rect">
+            <a:avLst/>
+          </a:prstGeom>
+          <a:noFill/>
+        </p:spPr>
+        <p:txBody>
+          <a:bodyPr wrap="none" lIns="0" rIns="0">
+            <a:noAutofit/>
+          </a:bodyPr>
+          <a:lstStyle/>
+          <a:p>
+            <a:pPr algn="r"/>
             <a:fld id="{4B0E1F8A-6C1D-4E2A-9F3B-7A5C8D2E1F60}" type="slidenum">
               <a:rPr sz="1600" b="0" i="0">
                 <a:solidFill>
@@ -39738,21 +39738,21 @@
         </p:nvSpPr>
         <p:spPr>
           <a:xfrm>
-            <a:off x="10363200" y="6035040"/>
-            <a:ext cx="1371600" cy="365760"/>
-          </a:xfrm>
-          <a:prstGeom prst="rect">
-            <a:avLst/>
-          </a:prstGeom>
-          <a:noFill/>
-        </p:spPr>
-        <p:txBody>
-          <a:bodyPr wrap="none" lIns="0" rIns="0">
-            <a:noAutofit/>
-          </a:bodyPr>
-          <a:lstStyle/>
-          <a:p>
-            <a:pPr algn="l"/>
+            <a:off x="11186160" y="6035040"/>
+            <a:ext cx="548640" cy="365760"/>
+          </a:xfrm>
+          <a:prstGeom prst="rect">
+            <a:avLst/>
+          </a:prstGeom>
+          <a:noFill/>
+        </p:spPr>
+        <p:txBody>
+          <a:bodyPr wrap="none" lIns="0" rIns="0">
+            <a:noAutofit/>
+          </a:bodyPr>
+          <a:lstStyle/>
+          <a:p>
+            <a:pPr algn="r"/>
             <a:fld id="{4B0E1F8A-6C1D-4E2A-9F3B-7A5C8D2E1F60}" type="slidenum">
               <a:rPr sz="1600" b="0" i="0">
                 <a:solidFill>
@@ -39817,7 +39817,7 @@
             <a:r>
               <a:rPr sz="4200" b="1" i="0">
                 <a:solidFill>
-                  <a:srgbClr val="8FC1F0"/>
+                  <a:srgbClr val="F0A202"/>
                 </a:solidFill>
                 <a:latin typeface="Arial"/>
               </a:rPr>
@@ -40116,21 +40116,21 @@
         </p:nvSpPr>
         <p:spPr>
           <a:xfrm>
-            <a:off x="10363200" y="6035040"/>
-            <a:ext cx="1371600" cy="365760"/>
-          </a:xfrm>
-          <a:prstGeom prst="rect">
-            <a:avLst/>
-          </a:prstGeom>
-          <a:noFill/>
-        </p:spPr>
-        <p:txBody>
-          <a:bodyPr wrap="none" lIns="0" rIns="0">
-            <a:noAutofit/>
-          </a:bodyPr>
-          <a:lstStyle/>
-          <a:p>
-            <a:pPr algn="l"/>
+            <a:off x="11186160" y="6035040"/>
+            <a:ext cx="548640" cy="365760"/>
+          </a:xfrm>
+          <a:prstGeom prst="rect">
+            <a:avLst/>
+          </a:prstGeom>
+          <a:noFill/>
+        </p:spPr>
+        <p:txBody>
+          <a:bodyPr wrap="none" lIns="0" rIns="0">
+            <a:noAutofit/>
+          </a:bodyPr>
+          <a:lstStyle/>
+          <a:p>
+            <a:pPr algn="r"/>
             <a:fld id="{4B0E1F8A-6C1D-4E2A-9F3B-7A5C8D2E1F60}" type="slidenum">
               <a:rPr sz="1600" b="0" i="0">
                 <a:solidFill>
